--- a/assets/Portfoilo/리얼 포폴 수정 (1).pptx
+++ b/assets/Portfoilo/리얼 포폴 수정 (1).pptx
@@ -27188,7 +27188,7 @@
 </file>
 
 <file path=ppt/slides/slide2.xml><?xml version="1.0" encoding="utf-8"?>
-<p:sld xmlns:a="http://schemas.openxmlformats.org/drawingml/2006/main" xmlns:r="http://schemas.openxmlformats.org/officeDocument/2006/relationships" xmlns:p="http://schemas.openxmlformats.org/presentationml/2006/main">
+<p:sld xmlns:a="http://schemas.openxmlformats.org/drawingml/2006/main" xmlns:a14="http://schemas.microsoft.com/office/drawing/2014/main" xmlns:p="http://schemas.openxmlformats.org/presentationml/2006/main" xmlns:r="http://schemas.openxmlformats.org/officeDocument/2006/relationships">
   <p:cSld>
     <p:spTree>
       <p:nvGrpSpPr>
@@ -28294,224 +28294,14 @@
         <p:spPr>
           <a:xfrm>
             <a:off x="5056759" y="2518028"/>
-            <a:ext cx="1818005" cy="578485"/>
+            <a:ext cx="2580000" cy="2520000"/>
           </a:xfrm>
           <a:prstGeom prst="rect">
             <a:avLst/>
           </a:prstGeom>
         </p:spPr>
         <p:txBody>
-          <a:bodyPr vert="horz" wrap="square" lIns="0" tIns="12700" rIns="0" bIns="0" rtlCol="0">
-            <a:spAutoFit/>
-          </a:bodyPr>
-          <a:lstStyle/>
-          <a:p>
-            <a:pPr marL="48895">
-              <a:lnSpc>
-                <a:spcPct val="100000"/>
-              </a:lnSpc>
-              <a:spcBef>
-                <a:spcPts val="100"/>
-              </a:spcBef>
-            </a:pPr>
-            <a:r>
-              <a:rPr sz="1200" dirty="0">
-                <a:solidFill>
-                  <a:srgbClr val="FFFFFF"/>
-                </a:solidFill>
-                <a:latin typeface="Calibri"/>
-                <a:cs typeface="Calibri"/>
-              </a:rPr>
-              <a:t>Up</a:t>
-            </a:r>
-            <a:r>
-              <a:rPr sz="1200" spc="-120" dirty="0">
-                <a:solidFill>
-                  <a:srgbClr val="FFFFFF"/>
-                </a:solidFill>
-                <a:latin typeface="Calibri"/>
-                <a:cs typeface="Calibri"/>
-              </a:rPr>
-              <a:t> </a:t>
-            </a:r>
-            <a:r>
-              <a:rPr sz="1200" dirty="0">
-                <a:solidFill>
-                  <a:srgbClr val="FFFFFF"/>
-                </a:solidFill>
-                <a:latin typeface="Calibri"/>
-                <a:cs typeface="Calibri"/>
-              </a:rPr>
-              <a:t>Trand</a:t>
-            </a:r>
-            <a:r>
-              <a:rPr sz="1200" spc="340" dirty="0">
-                <a:solidFill>
-                  <a:srgbClr val="FFFFFF"/>
-                </a:solidFill>
-                <a:latin typeface="Calibri"/>
-                <a:cs typeface="Calibri"/>
-              </a:rPr>
-              <a:t> </a:t>
-            </a:r>
-            <a:r>
-              <a:rPr sz="1200" dirty="0">
-                <a:solidFill>
-                  <a:srgbClr val="FFFFFF"/>
-                </a:solidFill>
-                <a:latin typeface="Malgun Gothic"/>
-                <a:cs typeface="Malgun Gothic"/>
-              </a:rPr>
-              <a:t>동아리</a:t>
-            </a:r>
-            <a:r>
-              <a:rPr sz="1200" spc="-55" dirty="0">
-                <a:solidFill>
-                  <a:srgbClr val="FFFFFF"/>
-                </a:solidFill>
-                <a:latin typeface="Malgun Gothic"/>
-                <a:cs typeface="Malgun Gothic"/>
-              </a:rPr>
-              <a:t> </a:t>
-            </a:r>
-            <a:r>
-              <a:rPr sz="1200" spc="-25" dirty="0">
-                <a:solidFill>
-                  <a:srgbClr val="FFFFFF"/>
-                </a:solidFill>
-                <a:latin typeface="Malgun Gothic"/>
-                <a:cs typeface="Malgun Gothic"/>
-              </a:rPr>
-              <a:t>활동</a:t>
-            </a:r>
-            <a:endParaRPr sz="1200">
-              <a:latin typeface="Malgun Gothic"/>
-              <a:cs typeface="Malgun Gothic"/>
-            </a:endParaRPr>
-          </a:p>
-          <a:p>
-            <a:pPr marL="12700">
-              <a:lnSpc>
-                <a:spcPct val="100000"/>
-              </a:lnSpc>
-              <a:spcBef>
-                <a:spcPts val="1475"/>
-              </a:spcBef>
-            </a:pPr>
-            <a:r>
-              <a:rPr sz="1200" dirty="0">
-                <a:solidFill>
-                  <a:srgbClr val="FFFFFF"/>
-                </a:solidFill>
-                <a:latin typeface="Calibri"/>
-                <a:cs typeface="Calibri"/>
-              </a:rPr>
-              <a:t>Up</a:t>
-            </a:r>
-            <a:r>
-              <a:rPr sz="1200" spc="-120" dirty="0">
-                <a:solidFill>
-                  <a:srgbClr val="FFFFFF"/>
-                </a:solidFill>
-                <a:latin typeface="Calibri"/>
-                <a:cs typeface="Calibri"/>
-              </a:rPr>
-              <a:t> </a:t>
-            </a:r>
-            <a:r>
-              <a:rPr sz="1200" dirty="0">
-                <a:solidFill>
-                  <a:srgbClr val="FFFFFF"/>
-                </a:solidFill>
-                <a:latin typeface="Calibri"/>
-                <a:cs typeface="Calibri"/>
-              </a:rPr>
-              <a:t>Trand</a:t>
-            </a:r>
-            <a:r>
-              <a:rPr sz="1200" spc="310" dirty="0">
-                <a:solidFill>
-                  <a:srgbClr val="FFFFFF"/>
-                </a:solidFill>
-                <a:latin typeface="Calibri"/>
-                <a:cs typeface="Calibri"/>
-              </a:rPr>
-              <a:t> </a:t>
-            </a:r>
-            <a:r>
-              <a:rPr sz="1200" dirty="0">
-                <a:solidFill>
-                  <a:srgbClr val="FFFFFF"/>
-                </a:solidFill>
-                <a:latin typeface="Malgun Gothic"/>
-                <a:cs typeface="Malgun Gothic"/>
-              </a:rPr>
-              <a:t>동아리</a:t>
-            </a:r>
-            <a:r>
-              <a:rPr sz="1200" spc="-65" dirty="0">
-                <a:solidFill>
-                  <a:srgbClr val="FFFFFF"/>
-                </a:solidFill>
-                <a:latin typeface="Malgun Gothic"/>
-                <a:cs typeface="Malgun Gothic"/>
-              </a:rPr>
-              <a:t> </a:t>
-            </a:r>
-            <a:r>
-              <a:rPr sz="1200" dirty="0">
-                <a:solidFill>
-                  <a:srgbClr val="FFFFFF"/>
-                </a:solidFill>
-                <a:latin typeface="Malgun Gothic"/>
-                <a:cs typeface="Malgun Gothic"/>
-              </a:rPr>
-              <a:t>회장</a:t>
-            </a:r>
-            <a:r>
-              <a:rPr sz="1200" spc="-70" dirty="0">
-                <a:solidFill>
-                  <a:srgbClr val="FFFFFF"/>
-                </a:solidFill>
-                <a:latin typeface="Malgun Gothic"/>
-                <a:cs typeface="Malgun Gothic"/>
-              </a:rPr>
-              <a:t> </a:t>
-            </a:r>
-            <a:r>
-              <a:rPr sz="1200" spc="-25" dirty="0">
-                <a:solidFill>
-                  <a:srgbClr val="FFFFFF"/>
-                </a:solidFill>
-                <a:latin typeface="Malgun Gothic"/>
-                <a:cs typeface="Malgun Gothic"/>
-              </a:rPr>
-              <a:t>운영</a:t>
-            </a:r>
-            <a:endParaRPr sz="1200">
-              <a:latin typeface="Malgun Gothic"/>
-              <a:cs typeface="Malgun Gothic"/>
-            </a:endParaRPr>
-          </a:p>
-        </p:txBody>
-      </p:sp>
-      <p:sp>
-        <p:nvSpPr>
-          <p:cNvPr id="29" name="object 29"/>
-          <p:cNvSpPr txBox="1"/>
-          <p:nvPr/>
-        </p:nvSpPr>
-        <p:spPr>
-          <a:xfrm>
-            <a:off x="5093334" y="3256915"/>
-            <a:ext cx="1303655" cy="208279"/>
-          </a:xfrm>
-          <a:prstGeom prst="rect">
-            <a:avLst/>
-          </a:prstGeom>
-        </p:spPr>
-        <p:txBody>
-          <a:bodyPr vert="horz" wrap="square" lIns="0" tIns="12700" rIns="0" bIns="0" rtlCol="0">
+          <a:bodyPr vert="horz" wrap="none" lIns="0" tIns="12700" rIns="0" bIns="0" rtlCol="0">
             <a:spAutoFit/>
           </a:bodyPr>
           <a:lstStyle/>
@@ -28525,78 +28315,162 @@
               </a:spcBef>
             </a:pPr>
             <a:r>
-              <a:rPr sz="1200" spc="65" dirty="0">
+              <a:rPr sz="1100" dirty="0">
                 <a:solidFill>
                   <a:srgbClr val="FFFFFF"/>
                 </a:solidFill>
-                <a:latin typeface="Calibri"/>
-                <a:cs typeface="Calibri"/>
-              </a:rPr>
-              <a:t>MAC</a:t>
-            </a:r>
-            <a:r>
-              <a:rPr sz="1200" spc="-120" dirty="0">
+                <a:latin typeface="Malgun Gothic"/>
+                <a:cs typeface="Malgun Gothic"/>
+              </a:rPr>
+              <a:t>ARES 화성 탐사 블록 코딩 프로젝트 개발 및 성과 발표</a:t>
+            </a:r>
+            <a:endParaRPr sz="1100">
+              <a:latin typeface="Malgun Gothic"/>
+              <a:cs typeface="Malgun Gothic"/>
+            </a:endParaRPr>
+          </a:p>
+          <a:p>
+            <a:pPr marL="12700">
+              <a:lnSpc>
+                <a:spcPct val="100000"/>
+              </a:lnSpc>
+              <a:spcBef>
+                <a:spcPts val="1470"/>
+              </a:spcBef>
+            </a:pPr>
+            <a:r>
+              <a:rPr sz="1100" dirty="0">
                 <a:solidFill>
                   <a:srgbClr val="FFFFFF"/>
                 </a:solidFill>
-                <a:latin typeface="Calibri"/>
-                <a:cs typeface="Calibri"/>
-              </a:rPr>
-              <a:t> </a:t>
-            </a:r>
-            <a:r>
-              <a:rPr sz="1200" dirty="0">
+                <a:latin typeface="Malgun Gothic"/>
+                <a:cs typeface="Malgun Gothic"/>
+              </a:rPr>
+              <a:t>Global Game Jam (GGJ 2026) 참여</a:t>
+            </a:r>
+            <a:endParaRPr sz="1100">
+              <a:latin typeface="Malgun Gothic"/>
+              <a:cs typeface="Malgun Gothic"/>
+            </a:endParaRPr>
+          </a:p>
+          <a:p>
+            <a:pPr marL="12700">
+              <a:lnSpc>
+                <a:spcPct val="100000"/>
+              </a:lnSpc>
+              <a:spcBef>
+                <a:spcPts val="1470"/>
+              </a:spcBef>
+            </a:pPr>
+            <a:r>
+              <a:rPr sz="1100" dirty="0">
                 <a:solidFill>
                   <a:srgbClr val="FFFFFF"/>
                 </a:solidFill>
-                <a:latin typeface="Calibri"/>
-                <a:cs typeface="Calibri"/>
-              </a:rPr>
-              <a:t>H</a:t>
-            </a:r>
-            <a:r>
-              <a:rPr sz="1200" spc="254" dirty="0">
+                <a:latin typeface="Malgun Gothic"/>
+                <a:cs typeface="Malgun Gothic"/>
+              </a:rPr>
+              <a:t>Mach Game Jam 참여</a:t>
+            </a:r>
+            <a:endParaRPr sz="1100">
+              <a:latin typeface="Malgun Gothic"/>
+              <a:cs typeface="Malgun Gothic"/>
+            </a:endParaRPr>
+          </a:p>
+          <a:p>
+            <a:pPr marL="12700">
+              <a:lnSpc>
+                <a:spcPct val="100000"/>
+              </a:lnSpc>
+              <a:spcBef>
+                <a:spcPts val="1470"/>
+              </a:spcBef>
+            </a:pPr>
+            <a:r>
+              <a:rPr sz="1100" dirty="0">
                 <a:solidFill>
                   <a:srgbClr val="FFFFFF"/>
                 </a:solidFill>
-                <a:latin typeface="Calibri"/>
-                <a:cs typeface="Calibri"/>
-              </a:rPr>
-              <a:t> </a:t>
-            </a:r>
-            <a:r>
-              <a:rPr sz="1200" spc="75" dirty="0">
+                <a:latin typeface="Malgun Gothic"/>
+                <a:cs typeface="Malgun Gothic"/>
+              </a:rPr>
+              <a:t>제179회 서울 코믹월드 인디 게임 부스 전시</a:t>
+            </a:r>
+            <a:endParaRPr sz="1100">
+              <a:latin typeface="Malgun Gothic"/>
+              <a:cs typeface="Malgun Gothic"/>
+            </a:endParaRPr>
+          </a:p>
+          <a:p>
+            <a:pPr marL="12700">
+              <a:lnSpc>
+                <a:spcPct val="100000"/>
+              </a:lnSpc>
+              <a:spcBef>
+                <a:spcPts val="1470"/>
+              </a:spcBef>
+            </a:pPr>
+            <a:r>
+              <a:rPr sz="1100" dirty="0">
                 <a:solidFill>
                   <a:srgbClr val="FFFFFF"/>
                 </a:solidFill>
-                <a:latin typeface="Calibri"/>
-                <a:cs typeface="Calibri"/>
-              </a:rPr>
-              <a:t>GAME</a:t>
-            </a:r>
-            <a:r>
-              <a:rPr sz="1200" spc="150" dirty="0">
+                <a:latin typeface="Malgun Gothic"/>
+                <a:cs typeface="Malgun Gothic"/>
+              </a:rPr>
+              <a:t>G-STAR 2025 인디 쇼케이스 &amp; 학교 부스 전시</a:t>
+            </a:r>
+            <a:endParaRPr sz="1100">
+              <a:latin typeface="Malgun Gothic"/>
+              <a:cs typeface="Malgun Gothic"/>
+            </a:endParaRPr>
+          </a:p>
+          <a:p>
+            <a:pPr marL="12700">
+              <a:lnSpc>
+                <a:spcPct val="100000"/>
+              </a:lnSpc>
+              <a:spcBef>
+                <a:spcPts val="1470"/>
+              </a:spcBef>
+            </a:pPr>
+            <a:r>
+              <a:rPr sz="1100" dirty="0">
                 <a:solidFill>
                   <a:srgbClr val="FFFFFF"/>
                 </a:solidFill>
-                <a:latin typeface="Calibri"/>
-                <a:cs typeface="Calibri"/>
-              </a:rPr>
-              <a:t> </a:t>
-            </a:r>
-            <a:r>
-              <a:rPr sz="1200" spc="-25" dirty="0">
+                <a:latin typeface="Malgun Gothic"/>
+                <a:cs typeface="Malgun Gothic"/>
+              </a:rPr>
+              <a:t>게임개발 동아리 UpTrand 회장 역임 (2024~현재 활동)</a:t>
+            </a:r>
+            <a:endParaRPr sz="1100">
+              <a:latin typeface="Malgun Gothic"/>
+              <a:cs typeface="Malgun Gothic"/>
+            </a:endParaRPr>
+          </a:p>
+          <a:p>
+            <a:pPr marL="12700">
+              <a:lnSpc>
+                <a:spcPct val="100000"/>
+              </a:lnSpc>
+              <a:spcBef>
+                <a:spcPts val="1470"/>
+              </a:spcBef>
+            </a:pPr>
+            <a:r>
+              <a:rPr sz="1100" dirty="0">
                 <a:solidFill>
                   <a:srgbClr val="FFFFFF"/>
                 </a:solidFill>
-                <a:latin typeface="Calibri"/>
-                <a:cs typeface="Calibri"/>
-              </a:rPr>
-              <a:t>JAM</a:t>
-            </a:r>
-            <a:endParaRPr sz="1200">
-              <a:latin typeface="Calibri"/>
-              <a:cs typeface="Calibri"/>
+                <a:latin typeface="Malgun Gothic"/>
+                <a:cs typeface="Malgun Gothic"/>
+              </a:rPr>
+              <a:t>G-STAR 2024 동명대학교 B2C 학교 부스 전시 참여</a:t>
+            </a:r>
+            <a:endParaRPr sz="1100">
+              <a:latin typeface="Malgun Gothic"/>
+              <a:cs typeface="Malgun Gothic"/>
             </a:endParaRPr>
           </a:p>
         </p:txBody>
@@ -28611,7 +28485,7 @@
         </p:nvGraphicFramePr>
         <p:xfrm>
           <a:off x="3416553" y="2485389"/>
-          <a:ext cx="1531620" cy="2557145"/>
+          <a:ext cx="1531620" cy="2520000"/>
         </p:xfrm>
         <a:graphic>
           <a:graphicData uri="http://schemas.openxmlformats.org/drawingml/2006/table">
@@ -28623,12 +28497,12 @@
                 <a:gridCol w="1531620">
                   <a:extLst>
                     <a:ext uri="{9D8B030D-6E8A-4147-A177-3AD203B41FA5}">
-                      <a16:colId xmlns:a16="http://schemas.microsoft.com/office/drawing/2014/main" val="20000"/>
+                      <a14:colId val="20000"/>
                     </a:ext>
                   </a:extLst>
                 </a:gridCol>
               </a:tblGrid>
-              <a:tr h="354330">
+              <a:tr h="360000">
                 <a:tc>
                   <a:txBody>
                     <a:bodyPr/>
@@ -28639,74 +28513,42 @@
                           <a:spcPct val="100000"/>
                         </a:lnSpc>
                         <a:spcBef>
-                          <a:spcPts val="334"/>
+                          <a:spcPts val="400"/>
                         </a:spcBef>
                       </a:pPr>
                       <a:r>
-                        <a:rPr sz="1400" b="1" dirty="0">
+                        <a:rPr sz="1200" b="1" dirty="0">
                           <a:latin typeface="Arial"/>
                           <a:cs typeface="Arial"/>
                         </a:rPr>
-                        <a:t>2024</a:t>
+                        <a:t>2025 ~ 2026</a:t>
                       </a:r>
-                      <a:r>
-                        <a:rPr sz="1400" b="1" spc="-20" dirty="0">
-                          <a:latin typeface="Arial"/>
-                          <a:cs typeface="Arial"/>
-                        </a:rPr>
-                        <a:t> </a:t>
-                      </a:r>
-                      <a:r>
-                        <a:rPr sz="1400" b="1" dirty="0">
-                          <a:latin typeface="Arial"/>
-                          <a:cs typeface="Arial"/>
-                        </a:rPr>
-                        <a:t>~</a:t>
-                      </a:r>
-                      <a:r>
-                        <a:rPr sz="1400" b="1" spc="-10" dirty="0">
-                          <a:latin typeface="Arial"/>
-                          <a:cs typeface="Arial"/>
-                        </a:rPr>
-                        <a:t> </a:t>
-                      </a:r>
-                      <a:r>
-                        <a:rPr sz="1400" b="1" spc="-25" dirty="0">
-                          <a:latin typeface="Malgun Gothic"/>
-                          <a:cs typeface="Malgun Gothic"/>
-                        </a:rPr>
-                        <a:t>현재</a:t>
-                      </a:r>
-                      <a:endParaRPr sz="1400">
-                        <a:latin typeface="Malgun Gothic"/>
-                        <a:cs typeface="Malgun Gothic"/>
+                      <a:endParaRPr sz="1200">
+                        <a:latin typeface="Arial"/>
+                        <a:cs typeface="Arial"/>
                       </a:endParaRPr>
                     </a:p>
                   </a:txBody>
-                  <a:tcPr marL="0" marR="0" marT="42544" marB="0">
-                    <a:lnL w="12700">
+                  <a:tcPr marL="0" marR="0" marT="50800" marB="0">
+                    <a:lnL w="12700" prstDash="solid">
                       <a:solidFill>
                         <a:srgbClr val="FFFFFF"/>
                       </a:solidFill>
-                      <a:prstDash val="solid"/>
                     </a:lnL>
-                    <a:lnR w="12700">
+                    <a:lnR w="12700" prstDash="solid">
                       <a:solidFill>
                         <a:srgbClr val="FFFFFF"/>
                       </a:solidFill>
-                      <a:prstDash val="solid"/>
                     </a:lnR>
-                    <a:lnT w="12700">
+                    <a:lnT w="12700" prstDash="solid">
                       <a:solidFill>
                         <a:srgbClr val="FFFFFF"/>
                       </a:solidFill>
-                      <a:prstDash val="solid"/>
                     </a:lnT>
-                    <a:lnB w="12700">
+                    <a:lnB w="12700" prstDash="solid">
                       <a:solidFill>
                         <a:srgbClr val="FFFFFF"/>
                       </a:solidFill>
-                      <a:prstDash val="solid"/>
                     </a:lnB>
                     <a:solidFill>
                       <a:srgbClr val="DFDFDF"/>
@@ -28715,89 +28557,57 @@
                 </a:tc>
                 <a:extLst>
                   <a:ext uri="{0D108BD9-81ED-4DB2-BD59-A6C34878D82A}">
-                    <a16:rowId xmlns:a16="http://schemas.microsoft.com/office/drawing/2014/main" val="10000"/>
+                    <a14:rowId val="10000"/>
                   </a:ext>
                 </a:extLst>
               </a:tr>
-              <a:tr h="369570">
+              <a:tr h="360000">
                 <a:tc>
                   <a:txBody>
                     <a:bodyPr/>
                     <a:lstStyle/>
                     <a:p>
-                      <a:pPr marL="1905" algn="ctr">
+                      <a:pPr algn="ctr">
                         <a:lnSpc>
                           <a:spcPct val="100000"/>
                         </a:lnSpc>
                         <a:spcBef>
-                          <a:spcPts val="459"/>
+                          <a:spcPts val="400"/>
                         </a:spcBef>
                       </a:pPr>
                       <a:r>
-                        <a:rPr sz="1100" b="1" dirty="0">
+                        <a:rPr sz="1400" b="1" dirty="0">
                           <a:latin typeface="Arial"/>
                           <a:cs typeface="Arial"/>
                         </a:rPr>
-                        <a:t>2025.03</a:t>
+                        <a:t>2026.01</a:t>
                       </a:r>
-                      <a:r>
-                        <a:rPr sz="1100" b="1" spc="-25" dirty="0">
-                          <a:latin typeface="Arial"/>
-                          <a:cs typeface="Arial"/>
-                        </a:rPr>
-                        <a:t> </a:t>
-                      </a:r>
-                      <a:r>
-                        <a:rPr sz="1100" b="1" dirty="0">
-                          <a:latin typeface="Arial"/>
-                          <a:cs typeface="Arial"/>
-                        </a:rPr>
-                        <a:t>~</a:t>
-                      </a:r>
-                      <a:r>
-                        <a:rPr sz="1100" b="1" spc="-15" dirty="0">
-                          <a:latin typeface="Arial"/>
-                          <a:cs typeface="Arial"/>
-                        </a:rPr>
-                        <a:t> </a:t>
-                      </a:r>
-                      <a:r>
-                        <a:rPr sz="1100" b="1" spc="-10" dirty="0">
-                          <a:latin typeface="Arial"/>
-                          <a:cs typeface="Arial"/>
-                        </a:rPr>
-                        <a:t>2026.03</a:t>
-                      </a:r>
-                      <a:endParaRPr sz="1100">
+                      <a:endParaRPr sz="1400">
                         <a:latin typeface="Arial"/>
                         <a:cs typeface="Arial"/>
                       </a:endParaRPr>
                     </a:p>
                   </a:txBody>
-                  <a:tcPr marL="0" marR="0" marT="58419" marB="0">
-                    <a:lnL w="12700">
+                  <a:tcPr marL="0" marR="0" marT="50800" marB="0">
+                    <a:lnL w="12700" prstDash="solid">
                       <a:solidFill>
                         <a:srgbClr val="FFFFFF"/>
                       </a:solidFill>
-                      <a:prstDash val="solid"/>
                     </a:lnL>
-                    <a:lnR w="12700">
+                    <a:lnR w="12700" prstDash="solid">
                       <a:solidFill>
                         <a:srgbClr val="FFFFFF"/>
                       </a:solidFill>
-                      <a:prstDash val="solid"/>
                     </a:lnR>
-                    <a:lnT w="12700">
+                    <a:lnT w="12700" prstDash="solid">
                       <a:solidFill>
                         <a:srgbClr val="FFFFFF"/>
                       </a:solidFill>
-                      <a:prstDash val="solid"/>
                     </a:lnT>
-                    <a:lnB w="12700">
+                    <a:lnB w="12700" prstDash="solid">
                       <a:solidFill>
                         <a:srgbClr val="FFFFFF"/>
                       </a:solidFill>
-                      <a:prstDash val="solid"/>
                     </a:lnB>
                     <a:solidFill>
                       <a:srgbClr val="DFDFDF"/>
@@ -28806,11 +28616,188 @@
                 </a:tc>
                 <a:extLst>
                   <a:ext uri="{0D108BD9-81ED-4DB2-BD59-A6C34878D82A}">
-                    <a16:rowId xmlns:a16="http://schemas.microsoft.com/office/drawing/2014/main" val="10001"/>
+                    <a14:rowId val="10001"/>
                   </a:ext>
                 </a:extLst>
               </a:tr>
-              <a:tr h="370205">
+              <a:tr h="360000">
+                <a:tc>
+                  <a:txBody>
+                    <a:bodyPr/>
+                    <a:lstStyle/>
+                    <a:p>
+                      <a:pPr algn="ctr">
+                        <a:lnSpc>
+                          <a:spcPct val="100000"/>
+                        </a:lnSpc>
+                        <a:spcBef>
+                          <a:spcPts val="400"/>
+                        </a:spcBef>
+                      </a:pPr>
+                      <a:r>
+                        <a:rPr sz="1400" b="1" dirty="0">
+                          <a:latin typeface="Arial"/>
+                          <a:cs typeface="Arial"/>
+                        </a:rPr>
+                        <a:t>2026.01</a:t>
+                      </a:r>
+                      <a:endParaRPr sz="1400">
+                        <a:latin typeface="Arial"/>
+                        <a:cs typeface="Arial"/>
+                      </a:endParaRPr>
+                    </a:p>
+                  </a:txBody>
+                  <a:tcPr marL="0" marR="0" marT="50800" marB="0">
+                    <a:lnL w="12700" prstDash="solid">
+                      <a:solidFill>
+                        <a:srgbClr val="FFFFFF"/>
+                      </a:solidFill>
+                    </a:lnL>
+                    <a:lnR w="12700" prstDash="solid">
+                      <a:solidFill>
+                        <a:srgbClr val="FFFFFF"/>
+                      </a:solidFill>
+                    </a:lnR>
+                    <a:lnT w="12700" prstDash="solid">
+                      <a:solidFill>
+                        <a:srgbClr val="FFFFFF"/>
+                      </a:solidFill>
+                    </a:lnT>
+                    <a:lnB w="12700" prstDash="solid">
+                      <a:solidFill>
+                        <a:srgbClr val="FFFFFF"/>
+                      </a:solidFill>
+                    </a:lnB>
+                    <a:solidFill>
+                      <a:srgbClr val="DFDFDF"/>
+                    </a:solidFill>
+                  </a:tcPr>
+                </a:tc>
+                <a:extLst>
+                  <a:ext uri="{0D108BD9-81ED-4DB2-BD59-A6C34878D82A}">
+                    <a14:rowId val="10002"/>
+                  </a:ext>
+                </a:extLst>
+              </a:tr>
+              <a:tr h="360000">
+                <a:tc>
+                  <a:txBody>
+                    <a:bodyPr/>
+                    <a:lstStyle/>
+                    <a:p>
+                      <a:pPr algn="ctr">
+                        <a:lnSpc>
+                          <a:spcPct val="100000"/>
+                        </a:lnSpc>
+                        <a:spcBef>
+                          <a:spcPts val="400"/>
+                        </a:spcBef>
+                      </a:pPr>
+                      <a:r>
+                        <a:rPr sz="1400" b="1" dirty="0">
+                          <a:latin typeface="Arial"/>
+                          <a:cs typeface="Arial"/>
+                        </a:rPr>
+                        <a:t>2025.12</a:t>
+                      </a:r>
+                      <a:endParaRPr sz="1400">
+                        <a:latin typeface="Arial"/>
+                        <a:cs typeface="Arial"/>
+                      </a:endParaRPr>
+                    </a:p>
+                  </a:txBody>
+                  <a:tcPr marL="0" marR="0" marT="50800" marB="0">
+                    <a:lnL w="12700" prstDash="solid">
+                      <a:solidFill>
+                        <a:srgbClr val="FFFFFF"/>
+                      </a:solidFill>
+                    </a:lnL>
+                    <a:lnR w="12700" prstDash="solid">
+                      <a:solidFill>
+                        <a:srgbClr val="FFFFFF"/>
+                      </a:solidFill>
+                    </a:lnR>
+                    <a:lnT w="12700" prstDash="solid">
+                      <a:solidFill>
+                        <a:srgbClr val="FFFFFF"/>
+                      </a:solidFill>
+                    </a:lnT>
+                    <a:lnB w="12700" prstDash="solid">
+                      <a:solidFill>
+                        <a:srgbClr val="FFFFFF"/>
+                      </a:solidFill>
+                    </a:lnB>
+                    <a:solidFill>
+                      <a:srgbClr val="DFDFDF"/>
+                    </a:solidFill>
+                  </a:tcPr>
+                </a:tc>
+                <a:extLst>
+                  <a:ext uri="{0D108BD9-81ED-4DB2-BD59-A6C34878D82A}">
+                    <a14:rowId val="10003"/>
+                  </a:ext>
+                </a:extLst>
+              </a:tr>
+              <a:tr h="360000">
+                <a:tc>
+                  <a:txBody>
+                    <a:bodyPr/>
+                    <a:lstStyle/>
+                    <a:p>
+                      <a:pPr algn="ctr">
+                        <a:lnSpc>
+                          <a:spcPct val="100000"/>
+                        </a:lnSpc>
+                        <a:spcBef>
+                          <a:spcPts val="400"/>
+                        </a:spcBef>
+                      </a:pPr>
+                      <a:r>
+                        <a:rPr sz="1400" b="1" dirty="0">
+                          <a:latin typeface="Arial"/>
+                          <a:cs typeface="Arial"/>
+                        </a:rPr>
+                        <a:t>2025.11</a:t>
+                      </a:r>
+                      <a:endParaRPr sz="1400">
+                        <a:latin typeface="Arial"/>
+                        <a:cs typeface="Arial"/>
+                      </a:endParaRPr>
+                    </a:p>
+                  </a:txBody>
+                  <a:tcPr marL="0" marR="0" marT="50800" marB="0">
+                    <a:lnL w="12700" prstDash="solid">
+                      <a:solidFill>
+                        <a:srgbClr val="FFFFFF"/>
+                      </a:solidFill>
+                    </a:lnL>
+                    <a:lnR w="12700" prstDash="solid">
+                      <a:solidFill>
+                        <a:srgbClr val="FFFFFF"/>
+                      </a:solidFill>
+                    </a:lnR>
+                    <a:lnT w="12700" prstDash="solid">
+                      <a:solidFill>
+                        <a:srgbClr val="FFFFFF"/>
+                      </a:solidFill>
+                    </a:lnT>
+                    <a:lnB w="12700" prstDash="solid">
+                      <a:solidFill>
+                        <a:srgbClr val="FFFFFF"/>
+                      </a:solidFill>
+                    </a:lnB>
+                    <a:solidFill>
+                      <a:srgbClr val="DFDFDF"/>
+                    </a:solidFill>
+                  </a:tcPr>
+                </a:tc>
+                <a:extLst>
+                  <a:ext uri="{0D108BD9-81ED-4DB2-BD59-A6C34878D82A}">
+                    <a14:rowId val="10004"/>
+                  </a:ext>
+                </a:extLst>
+              </a:tr>
+              <a:tr h="360000">
                 <a:tc>
                   <a:txBody>
                     <a:bodyPr/>
@@ -28825,42 +28812,38 @@
                         </a:spcBef>
                       </a:pPr>
                       <a:r>
-                        <a:rPr sz="1400" b="1" spc="-10" dirty="0">
+                        <a:rPr sz="1100" b="1" dirty="0">
                           <a:latin typeface="Arial"/>
                           <a:cs typeface="Arial"/>
                         </a:rPr>
-                        <a:t>2026.01</a:t>
+                        <a:t>2025.03 ~ 2026.03</a:t>
                       </a:r>
-                      <a:endParaRPr sz="1400">
+                      <a:endParaRPr sz="1100">
                         <a:latin typeface="Arial"/>
                         <a:cs typeface="Arial"/>
                       </a:endParaRPr>
                     </a:p>
                   </a:txBody>
-                  <a:tcPr marL="0" marR="0" marT="57150" marB="0">
-                    <a:lnL w="12700">
+                  <a:tcPr marL="0" marR="0" marT="50800" marB="0">
+                    <a:lnL w="12700" prstDash="solid">
                       <a:solidFill>
                         <a:srgbClr val="FFFFFF"/>
                       </a:solidFill>
-                      <a:prstDash val="solid"/>
                     </a:lnL>
-                    <a:lnR w="12700">
+                    <a:lnR w="12700" prstDash="solid">
                       <a:solidFill>
                         <a:srgbClr val="FFFFFF"/>
                       </a:solidFill>
-                      <a:prstDash val="solid"/>
                     </a:lnR>
-                    <a:lnT w="12700">
+                    <a:lnT w="12700" prstDash="solid">
                       <a:solidFill>
                         <a:srgbClr val="FFFFFF"/>
                       </a:solidFill>
-                      <a:prstDash val="solid"/>
                     </a:lnT>
-                    <a:lnB w="12700">
+                    <a:lnB w="12700" prstDash="solid">
                       <a:solidFill>
                         <a:srgbClr val="FFFFFF"/>
                       </a:solidFill>
-                      <a:prstDash val="solid"/>
                     </a:lnB>
                     <a:solidFill>
                       <a:srgbClr val="DFDFDF"/>
@@ -28869,11 +28852,11 @@
                 </a:tc>
                 <a:extLst>
                   <a:ext uri="{0D108BD9-81ED-4DB2-BD59-A6C34878D82A}">
-                    <a16:rowId xmlns:a16="http://schemas.microsoft.com/office/drawing/2014/main" val="10002"/>
+                    <a14:rowId val="10005"/>
                   </a:ext>
                 </a:extLst>
               </a:tr>
-              <a:tr h="368935">
+              <a:tr h="360000">
                 <a:tc>
                   <a:txBody>
                     <a:bodyPr/>
@@ -28884,15 +28867,15 @@
                           <a:spcPct val="100000"/>
                         </a:lnSpc>
                         <a:spcBef>
-                          <a:spcPts val="450"/>
+                          <a:spcPts val="400"/>
                         </a:spcBef>
                       </a:pPr>
                       <a:r>
-                        <a:rPr sz="1400" b="1" spc="-10" dirty="0">
+                        <a:rPr sz="1400" b="1" dirty="0">
                           <a:latin typeface="Arial"/>
                           <a:cs typeface="Arial"/>
                         </a:rPr>
-                        <a:t>2026.01</a:t>
+                        <a:t>2024.11</a:t>
                       </a:r>
                       <a:endParaRPr sz="1400">
                         <a:latin typeface="Arial"/>
@@ -28900,30 +28883,26 @@
                       </a:endParaRPr>
                     </a:p>
                   </a:txBody>
-                  <a:tcPr marL="0" marR="0" marT="57150" marB="0">
-                    <a:lnL w="12700">
+                  <a:tcPr marL="0" marR="0" marT="50800" marB="0">
+                    <a:lnL w="12700" prstDash="solid">
                       <a:solidFill>
                         <a:srgbClr val="FFFFFF"/>
                       </a:solidFill>
-                      <a:prstDash val="solid"/>
                     </a:lnL>
-                    <a:lnR w="12700">
+                    <a:lnR w="12700" prstDash="solid">
                       <a:solidFill>
                         <a:srgbClr val="FFFFFF"/>
                       </a:solidFill>
-                      <a:prstDash val="solid"/>
                     </a:lnR>
-                    <a:lnT w="12700">
+                    <a:lnT w="12700" prstDash="solid">
                       <a:solidFill>
                         <a:srgbClr val="FFFFFF"/>
                       </a:solidFill>
-                      <a:prstDash val="solid"/>
                     </a:lnT>
-                    <a:lnB w="12700">
+                    <a:lnB w="12700" prstDash="solid">
                       <a:solidFill>
                         <a:srgbClr val="FFFFFF"/>
                       </a:solidFill>
-                      <a:prstDash val="solid"/>
                     </a:lnB>
                     <a:solidFill>
                       <a:srgbClr val="DFDFDF"/>
@@ -28932,196 +28911,7 @@
                 </a:tc>
                 <a:extLst>
                   <a:ext uri="{0D108BD9-81ED-4DB2-BD59-A6C34878D82A}">
-                    <a16:rowId xmlns:a16="http://schemas.microsoft.com/office/drawing/2014/main" val="10003"/>
-                  </a:ext>
-                </a:extLst>
-              </a:tr>
-              <a:tr h="370205">
-                <a:tc>
-                  <a:txBody>
-                    <a:bodyPr/>
-                    <a:lstStyle/>
-                    <a:p>
-                      <a:pPr marL="1270" algn="ctr">
-                        <a:lnSpc>
-                          <a:spcPct val="100000"/>
-                        </a:lnSpc>
-                        <a:spcBef>
-                          <a:spcPts val="450"/>
-                        </a:spcBef>
-                      </a:pPr>
-                      <a:r>
-                        <a:rPr sz="1400" b="1" spc="-20" dirty="0">
-                          <a:latin typeface="Arial"/>
-                          <a:cs typeface="Arial"/>
-                        </a:rPr>
-                        <a:t>2025</a:t>
-                      </a:r>
-                      <a:endParaRPr sz="1400">
-                        <a:latin typeface="Arial"/>
-                        <a:cs typeface="Arial"/>
-                      </a:endParaRPr>
-                    </a:p>
-                  </a:txBody>
-                  <a:tcPr marL="0" marR="0" marT="57150" marB="0">
-                    <a:lnL w="12700">
-                      <a:solidFill>
-                        <a:srgbClr val="FFFFFF"/>
-                      </a:solidFill>
-                      <a:prstDash val="solid"/>
-                    </a:lnL>
-                    <a:lnR w="12700">
-                      <a:solidFill>
-                        <a:srgbClr val="FFFFFF"/>
-                      </a:solidFill>
-                      <a:prstDash val="solid"/>
-                    </a:lnR>
-                    <a:lnT w="12700">
-                      <a:solidFill>
-                        <a:srgbClr val="FFFFFF"/>
-                      </a:solidFill>
-                      <a:prstDash val="solid"/>
-                    </a:lnT>
-                    <a:lnB w="12700">
-                      <a:solidFill>
-                        <a:srgbClr val="FFFFFF"/>
-                      </a:solidFill>
-                      <a:prstDash val="solid"/>
-                    </a:lnB>
-                    <a:solidFill>
-                      <a:srgbClr val="DFDFDF"/>
-                    </a:solidFill>
-                  </a:tcPr>
-                </a:tc>
-                <a:extLst>
-                  <a:ext uri="{0D108BD9-81ED-4DB2-BD59-A6C34878D82A}">
-                    <a16:rowId xmlns:a16="http://schemas.microsoft.com/office/drawing/2014/main" val="10004"/>
-                  </a:ext>
-                </a:extLst>
-              </a:tr>
-              <a:tr h="370840">
-                <a:tc>
-                  <a:txBody>
-                    <a:bodyPr/>
-                    <a:lstStyle/>
-                    <a:p>
-                      <a:pPr marL="1270" algn="ctr">
-                        <a:lnSpc>
-                          <a:spcPct val="100000"/>
-                        </a:lnSpc>
-                        <a:spcBef>
-                          <a:spcPts val="450"/>
-                        </a:spcBef>
-                      </a:pPr>
-                      <a:r>
-                        <a:rPr sz="1400" b="1" spc="-20" dirty="0">
-                          <a:latin typeface="Arial"/>
-                          <a:cs typeface="Arial"/>
-                        </a:rPr>
-                        <a:t>2025</a:t>
-                      </a:r>
-                      <a:endParaRPr sz="1400">
-                        <a:latin typeface="Arial"/>
-                        <a:cs typeface="Arial"/>
-                      </a:endParaRPr>
-                    </a:p>
-                  </a:txBody>
-                  <a:tcPr marL="0" marR="0" marT="57150" marB="0">
-                    <a:lnL w="12700">
-                      <a:solidFill>
-                        <a:srgbClr val="FFFFFF"/>
-                      </a:solidFill>
-                      <a:prstDash val="solid"/>
-                    </a:lnL>
-                    <a:lnR w="12700">
-                      <a:solidFill>
-                        <a:srgbClr val="FFFFFF"/>
-                      </a:solidFill>
-                      <a:prstDash val="solid"/>
-                    </a:lnR>
-                    <a:lnT w="12700">
-                      <a:solidFill>
-                        <a:srgbClr val="FFFFFF"/>
-                      </a:solidFill>
-                      <a:prstDash val="solid"/>
-                    </a:lnT>
-                    <a:lnB w="12700">
-                      <a:solidFill>
-                        <a:srgbClr val="FFFFFF"/>
-                      </a:solidFill>
-                      <a:prstDash val="solid"/>
-                    </a:lnB>
-                    <a:solidFill>
-                      <a:srgbClr val="DFDFDF"/>
-                    </a:solidFill>
-                  </a:tcPr>
-                </a:tc>
-                <a:extLst>
-                  <a:ext uri="{0D108BD9-81ED-4DB2-BD59-A6C34878D82A}">
-                    <a16:rowId xmlns:a16="http://schemas.microsoft.com/office/drawing/2014/main" val="10005"/>
-                  </a:ext>
-                </a:extLst>
-              </a:tr>
-              <a:tr h="353060">
-                <a:tc>
-                  <a:txBody>
-                    <a:bodyPr/>
-                    <a:lstStyle/>
-                    <a:p>
-                      <a:pPr marL="635" algn="ctr">
-                        <a:lnSpc>
-                          <a:spcPct val="100000"/>
-                        </a:lnSpc>
-                        <a:spcBef>
-                          <a:spcPts val="455"/>
-                        </a:spcBef>
-                      </a:pPr>
-                      <a:r>
-                        <a:rPr sz="1400" b="1" spc="-20" dirty="0">
-                          <a:latin typeface="Arial"/>
-                          <a:cs typeface="Arial"/>
-                        </a:rPr>
-                        <a:t>2024</a:t>
-                      </a:r>
-                      <a:endParaRPr sz="1400">
-                        <a:latin typeface="Arial"/>
-                        <a:cs typeface="Arial"/>
-                      </a:endParaRPr>
-                    </a:p>
-                  </a:txBody>
-                  <a:tcPr marL="0" marR="0" marT="57785" marB="0">
-                    <a:lnL w="12700">
-                      <a:solidFill>
-                        <a:srgbClr val="FFFFFF"/>
-                      </a:solidFill>
-                      <a:prstDash val="solid"/>
-                    </a:lnL>
-                    <a:lnR w="12700">
-                      <a:solidFill>
-                        <a:srgbClr val="FFFFFF"/>
-                      </a:solidFill>
-                      <a:prstDash val="solid"/>
-                    </a:lnR>
-                    <a:lnT w="12700">
-                      <a:solidFill>
-                        <a:srgbClr val="FFFFFF"/>
-                      </a:solidFill>
-                      <a:prstDash val="solid"/>
-                    </a:lnT>
-                    <a:lnB w="12700">
-                      <a:solidFill>
-                        <a:srgbClr val="FFFFFF"/>
-                      </a:solidFill>
-                      <a:prstDash val="solid"/>
-                    </a:lnB>
-                    <a:solidFill>
-                      <a:srgbClr val="DFDFDF"/>
-                    </a:solidFill>
-                  </a:tcPr>
-                </a:tc>
-                <a:extLst>
-                  <a:ext uri="{0D108BD9-81ED-4DB2-BD59-A6C34878D82A}">
-                    <a16:rowId xmlns:a16="http://schemas.microsoft.com/office/drawing/2014/main" val="10006"/>
+                    <a14:rowId val="10006"/>
                   </a:ext>
                 </a:extLst>
               </a:tr>
@@ -29129,514 +28919,6 @@
           </a:graphicData>
         </a:graphic>
       </p:graphicFrame>
-      <p:sp>
-        <p:nvSpPr>
-          <p:cNvPr id="31" name="object 31"/>
-          <p:cNvSpPr txBox="1"/>
-          <p:nvPr/>
-        </p:nvSpPr>
-        <p:spPr>
-          <a:xfrm>
-            <a:off x="5075301" y="3628390"/>
-            <a:ext cx="2080260" cy="1368425"/>
-          </a:xfrm>
-          <a:prstGeom prst="rect">
-            <a:avLst/>
-          </a:prstGeom>
-        </p:spPr>
-        <p:txBody>
-          <a:bodyPr vert="horz" wrap="square" lIns="0" tIns="12700" rIns="0" bIns="0" rtlCol="0">
-            <a:spAutoFit/>
-          </a:bodyPr>
-          <a:lstStyle/>
-          <a:p>
-            <a:pPr marL="22225">
-              <a:lnSpc>
-                <a:spcPct val="100000"/>
-              </a:lnSpc>
-              <a:spcBef>
-                <a:spcPts val="100"/>
-              </a:spcBef>
-            </a:pPr>
-            <a:r>
-              <a:rPr sz="1200" spc="60" dirty="0">
-                <a:solidFill>
-                  <a:srgbClr val="FFFFFF"/>
-                </a:solidFill>
-                <a:latin typeface="Calibri"/>
-                <a:cs typeface="Calibri"/>
-              </a:rPr>
-              <a:t>GGJ</a:t>
-            </a:r>
-            <a:r>
-              <a:rPr sz="1200" spc="140" dirty="0">
-                <a:solidFill>
-                  <a:srgbClr val="FFFFFF"/>
-                </a:solidFill>
-                <a:latin typeface="Calibri"/>
-                <a:cs typeface="Calibri"/>
-              </a:rPr>
-              <a:t> </a:t>
-            </a:r>
-            <a:r>
-              <a:rPr sz="1200" dirty="0">
-                <a:solidFill>
-                  <a:srgbClr val="FFFFFF"/>
-                </a:solidFill>
-                <a:latin typeface="Malgun Gothic"/>
-                <a:cs typeface="Malgun Gothic"/>
-              </a:rPr>
-              <a:t>글로벌</a:t>
-            </a:r>
-            <a:r>
-              <a:rPr sz="1200" spc="-125" dirty="0">
-                <a:solidFill>
-                  <a:srgbClr val="FFFFFF"/>
-                </a:solidFill>
-                <a:latin typeface="Malgun Gothic"/>
-                <a:cs typeface="Malgun Gothic"/>
-              </a:rPr>
-              <a:t> </a:t>
-            </a:r>
-            <a:r>
-              <a:rPr sz="1200" spc="-25" dirty="0">
-                <a:solidFill>
-                  <a:srgbClr val="FFFFFF"/>
-                </a:solidFill>
-                <a:latin typeface="Malgun Gothic"/>
-                <a:cs typeface="Malgun Gothic"/>
-              </a:rPr>
-              <a:t>게임잼</a:t>
-            </a:r>
-            <a:endParaRPr sz="1200">
-              <a:latin typeface="Malgun Gothic"/>
-              <a:cs typeface="Malgun Gothic"/>
-            </a:endParaRPr>
-          </a:p>
-          <a:p>
-            <a:pPr marL="12700" indent="5715">
-              <a:lnSpc>
-                <a:spcPct val="100000"/>
-              </a:lnSpc>
-              <a:spcBef>
-                <a:spcPts val="1470"/>
-              </a:spcBef>
-            </a:pPr>
-            <a:r>
-              <a:rPr sz="1200" dirty="0">
-                <a:solidFill>
-                  <a:srgbClr val="FFFFFF"/>
-                </a:solidFill>
-                <a:latin typeface="Malgun Gothic"/>
-                <a:cs typeface="Malgun Gothic"/>
-              </a:rPr>
-              <a:t>서울</a:t>
-            </a:r>
-            <a:r>
-              <a:rPr sz="1200" spc="-125" dirty="0">
-                <a:solidFill>
-                  <a:srgbClr val="FFFFFF"/>
-                </a:solidFill>
-                <a:latin typeface="Malgun Gothic"/>
-                <a:cs typeface="Malgun Gothic"/>
-              </a:rPr>
-              <a:t> </a:t>
-            </a:r>
-            <a:r>
-              <a:rPr sz="1200" dirty="0">
-                <a:solidFill>
-                  <a:srgbClr val="FFFFFF"/>
-                </a:solidFill>
-                <a:latin typeface="Malgun Gothic"/>
-                <a:cs typeface="Malgun Gothic"/>
-              </a:rPr>
-              <a:t>코믹</a:t>
-            </a:r>
-            <a:r>
-              <a:rPr sz="1200" spc="-125" dirty="0">
-                <a:solidFill>
-                  <a:srgbClr val="FFFFFF"/>
-                </a:solidFill>
-                <a:latin typeface="Malgun Gothic"/>
-                <a:cs typeface="Malgun Gothic"/>
-              </a:rPr>
-              <a:t> </a:t>
-            </a:r>
-            <a:r>
-              <a:rPr sz="1200" dirty="0">
-                <a:solidFill>
-                  <a:srgbClr val="FFFFFF"/>
-                </a:solidFill>
-                <a:latin typeface="Malgun Gothic"/>
-                <a:cs typeface="Malgun Gothic"/>
-              </a:rPr>
-              <a:t>월드</a:t>
-            </a:r>
-            <a:r>
-              <a:rPr sz="1200" spc="-125" dirty="0">
-                <a:solidFill>
-                  <a:srgbClr val="FFFFFF"/>
-                </a:solidFill>
-                <a:latin typeface="Malgun Gothic"/>
-                <a:cs typeface="Malgun Gothic"/>
-              </a:rPr>
-              <a:t> </a:t>
-            </a:r>
-            <a:r>
-              <a:rPr sz="1200" dirty="0">
-                <a:solidFill>
-                  <a:srgbClr val="FFFFFF"/>
-                </a:solidFill>
-                <a:latin typeface="Malgun Gothic"/>
-                <a:cs typeface="Malgun Gothic"/>
-              </a:rPr>
-              <a:t>인디</a:t>
-            </a:r>
-            <a:r>
-              <a:rPr sz="1200" spc="-125" dirty="0">
-                <a:solidFill>
-                  <a:srgbClr val="FFFFFF"/>
-                </a:solidFill>
-                <a:latin typeface="Malgun Gothic"/>
-                <a:cs typeface="Malgun Gothic"/>
-              </a:rPr>
-              <a:t> </a:t>
-            </a:r>
-            <a:r>
-              <a:rPr sz="1200" dirty="0">
-                <a:solidFill>
-                  <a:srgbClr val="FFFFFF"/>
-                </a:solidFill>
-                <a:latin typeface="Malgun Gothic"/>
-                <a:cs typeface="Malgun Gothic"/>
-              </a:rPr>
-              <a:t>부스</a:t>
-            </a:r>
-            <a:r>
-              <a:rPr sz="1200" spc="-125" dirty="0">
-                <a:solidFill>
-                  <a:srgbClr val="FFFFFF"/>
-                </a:solidFill>
-                <a:latin typeface="Malgun Gothic"/>
-                <a:cs typeface="Malgun Gothic"/>
-              </a:rPr>
-              <a:t> </a:t>
-            </a:r>
-            <a:r>
-              <a:rPr sz="1200" spc="-25" dirty="0">
-                <a:solidFill>
-                  <a:srgbClr val="FFFFFF"/>
-                </a:solidFill>
-                <a:latin typeface="Malgun Gothic"/>
-                <a:cs typeface="Malgun Gothic"/>
-              </a:rPr>
-              <a:t>참여</a:t>
-            </a:r>
-            <a:endParaRPr sz="1200">
-              <a:latin typeface="Malgun Gothic"/>
-              <a:cs typeface="Malgun Gothic"/>
-            </a:endParaRPr>
-          </a:p>
-          <a:p>
-            <a:pPr marL="12700" marR="5080">
-              <a:lnSpc>
-                <a:spcPct val="100000"/>
-              </a:lnSpc>
-              <a:spcBef>
-                <a:spcPts val="1025"/>
-              </a:spcBef>
-            </a:pPr>
-            <a:r>
-              <a:rPr sz="1200" dirty="0">
-                <a:solidFill>
-                  <a:srgbClr val="FFFFFF"/>
-                </a:solidFill>
-                <a:latin typeface="Malgun Gothic"/>
-                <a:cs typeface="Malgun Gothic"/>
-              </a:rPr>
-              <a:t>지스타</a:t>
-            </a:r>
-            <a:r>
-              <a:rPr sz="1200" spc="-125" dirty="0">
-                <a:solidFill>
-                  <a:srgbClr val="FFFFFF"/>
-                </a:solidFill>
-                <a:latin typeface="Malgun Gothic"/>
-                <a:cs typeface="Malgun Gothic"/>
-              </a:rPr>
-              <a:t> </a:t>
-            </a:r>
-            <a:r>
-              <a:rPr sz="1200" dirty="0">
-                <a:solidFill>
-                  <a:srgbClr val="FFFFFF"/>
-                </a:solidFill>
-                <a:latin typeface="Malgun Gothic"/>
-                <a:cs typeface="Malgun Gothic"/>
-              </a:rPr>
-              <a:t>학교</a:t>
-            </a:r>
-            <a:r>
-              <a:rPr sz="1200" spc="-125" dirty="0">
-                <a:solidFill>
-                  <a:srgbClr val="FFFFFF"/>
-                </a:solidFill>
-                <a:latin typeface="Malgun Gothic"/>
-                <a:cs typeface="Malgun Gothic"/>
-              </a:rPr>
-              <a:t> </a:t>
-            </a:r>
-            <a:r>
-              <a:rPr sz="1200" dirty="0">
-                <a:solidFill>
-                  <a:srgbClr val="FFFFFF"/>
-                </a:solidFill>
-                <a:latin typeface="Malgun Gothic"/>
-                <a:cs typeface="Malgun Gothic"/>
-              </a:rPr>
-              <a:t>부스</a:t>
-            </a:r>
-            <a:r>
-              <a:rPr sz="1200" spc="-125" dirty="0">
-                <a:solidFill>
-                  <a:srgbClr val="FFFFFF"/>
-                </a:solidFill>
-                <a:latin typeface="Malgun Gothic"/>
-                <a:cs typeface="Malgun Gothic"/>
-              </a:rPr>
-              <a:t> </a:t>
-            </a:r>
-            <a:r>
-              <a:rPr sz="1200" dirty="0">
-                <a:solidFill>
-                  <a:srgbClr val="FFFFFF"/>
-                </a:solidFill>
-                <a:latin typeface="Malgun Gothic"/>
-                <a:cs typeface="Malgun Gothic"/>
-              </a:rPr>
-              <a:t>전시</a:t>
-            </a:r>
-            <a:r>
-              <a:rPr sz="1200" spc="-125" dirty="0">
-                <a:solidFill>
-                  <a:srgbClr val="FFFFFF"/>
-                </a:solidFill>
-                <a:latin typeface="Malgun Gothic"/>
-                <a:cs typeface="Malgun Gothic"/>
-              </a:rPr>
-              <a:t> </a:t>
-            </a:r>
-            <a:r>
-              <a:rPr sz="1200" dirty="0">
-                <a:solidFill>
-                  <a:srgbClr val="FFFFFF"/>
-                </a:solidFill>
-                <a:latin typeface="Malgun Gothic"/>
-                <a:cs typeface="Malgun Gothic"/>
-              </a:rPr>
-              <a:t>참여</a:t>
-            </a:r>
-            <a:r>
-              <a:rPr sz="1200" dirty="0">
-                <a:solidFill>
-                  <a:srgbClr val="FFFFFF"/>
-                </a:solidFill>
-                <a:latin typeface="Calibri"/>
-                <a:cs typeface="Calibri"/>
-              </a:rPr>
-              <a:t>, </a:t>
-            </a:r>
-            <a:r>
-              <a:rPr sz="1200" spc="-50" dirty="0">
-                <a:solidFill>
-                  <a:srgbClr val="FFFFFF"/>
-                </a:solidFill>
-                <a:latin typeface="Malgun Gothic"/>
-                <a:cs typeface="Malgun Gothic"/>
-              </a:rPr>
-              <a:t>인 </a:t>
-            </a:r>
-            <a:r>
-              <a:rPr sz="1200" dirty="0">
-                <a:solidFill>
-                  <a:srgbClr val="FFFFFF"/>
-                </a:solidFill>
-                <a:latin typeface="Malgun Gothic"/>
-                <a:cs typeface="Malgun Gothic"/>
-              </a:rPr>
-              <a:t>디</a:t>
-            </a:r>
-            <a:r>
-              <a:rPr sz="1200" spc="-125" dirty="0">
-                <a:solidFill>
-                  <a:srgbClr val="FFFFFF"/>
-                </a:solidFill>
-                <a:latin typeface="Malgun Gothic"/>
-                <a:cs typeface="Malgun Gothic"/>
-              </a:rPr>
-              <a:t> </a:t>
-            </a:r>
-            <a:r>
-              <a:rPr sz="1200" dirty="0">
-                <a:solidFill>
-                  <a:srgbClr val="FFFFFF"/>
-                </a:solidFill>
-                <a:latin typeface="Malgun Gothic"/>
-                <a:cs typeface="Malgun Gothic"/>
-              </a:rPr>
-              <a:t>쇼케이스</a:t>
-            </a:r>
-            <a:r>
-              <a:rPr sz="1200" spc="-125" dirty="0">
-                <a:solidFill>
-                  <a:srgbClr val="FFFFFF"/>
-                </a:solidFill>
-                <a:latin typeface="Malgun Gothic"/>
-                <a:cs typeface="Malgun Gothic"/>
-              </a:rPr>
-              <a:t> </a:t>
-            </a:r>
-            <a:r>
-              <a:rPr sz="1200" dirty="0">
-                <a:solidFill>
-                  <a:srgbClr val="FFFFFF"/>
-                </a:solidFill>
-                <a:latin typeface="Malgun Gothic"/>
-                <a:cs typeface="Malgun Gothic"/>
-              </a:rPr>
-              <a:t>부스</a:t>
-            </a:r>
-            <a:r>
-              <a:rPr sz="1200" spc="-125" dirty="0">
-                <a:solidFill>
-                  <a:srgbClr val="FFFFFF"/>
-                </a:solidFill>
-                <a:latin typeface="Malgun Gothic"/>
-                <a:cs typeface="Malgun Gothic"/>
-              </a:rPr>
-              <a:t> </a:t>
-            </a:r>
-            <a:r>
-              <a:rPr sz="1200" spc="-25" dirty="0">
-                <a:solidFill>
-                  <a:srgbClr val="FFFFFF"/>
-                </a:solidFill>
-                <a:latin typeface="Malgun Gothic"/>
-                <a:cs typeface="Malgun Gothic"/>
-              </a:rPr>
-              <a:t>참여</a:t>
-            </a:r>
-            <a:endParaRPr sz="1200">
-              <a:latin typeface="Malgun Gothic"/>
-              <a:cs typeface="Malgun Gothic"/>
-            </a:endParaRPr>
-          </a:p>
-          <a:p>
-            <a:pPr marL="18415">
-              <a:lnSpc>
-                <a:spcPct val="100000"/>
-              </a:lnSpc>
-              <a:spcBef>
-                <a:spcPts val="875"/>
-              </a:spcBef>
-            </a:pPr>
-            <a:r>
-              <a:rPr sz="1200" dirty="0">
-                <a:solidFill>
-                  <a:srgbClr val="FFFFFF"/>
-                </a:solidFill>
-                <a:latin typeface="Malgun Gothic"/>
-                <a:cs typeface="Malgun Gothic"/>
-              </a:rPr>
-              <a:t>지스타</a:t>
-            </a:r>
-            <a:r>
-              <a:rPr sz="1200" spc="-125" dirty="0">
-                <a:solidFill>
-                  <a:srgbClr val="FFFFFF"/>
-                </a:solidFill>
-                <a:latin typeface="Malgun Gothic"/>
-                <a:cs typeface="Malgun Gothic"/>
-              </a:rPr>
-              <a:t> </a:t>
-            </a:r>
-            <a:r>
-              <a:rPr sz="1200" dirty="0">
-                <a:solidFill>
-                  <a:srgbClr val="FFFFFF"/>
-                </a:solidFill>
-                <a:latin typeface="Malgun Gothic"/>
-                <a:cs typeface="Malgun Gothic"/>
-              </a:rPr>
-              <a:t>학교</a:t>
-            </a:r>
-            <a:r>
-              <a:rPr sz="1200" spc="-125" dirty="0">
-                <a:solidFill>
-                  <a:srgbClr val="FFFFFF"/>
-                </a:solidFill>
-                <a:latin typeface="Malgun Gothic"/>
-                <a:cs typeface="Malgun Gothic"/>
-              </a:rPr>
-              <a:t> </a:t>
-            </a:r>
-            <a:r>
-              <a:rPr sz="1200" dirty="0">
-                <a:solidFill>
-                  <a:srgbClr val="FFFFFF"/>
-                </a:solidFill>
-                <a:latin typeface="Malgun Gothic"/>
-                <a:cs typeface="Malgun Gothic"/>
-              </a:rPr>
-              <a:t>부스</a:t>
-            </a:r>
-            <a:r>
-              <a:rPr sz="1200" spc="-125" dirty="0">
-                <a:solidFill>
-                  <a:srgbClr val="FFFFFF"/>
-                </a:solidFill>
-                <a:latin typeface="Malgun Gothic"/>
-                <a:cs typeface="Malgun Gothic"/>
-              </a:rPr>
-              <a:t> </a:t>
-            </a:r>
-            <a:r>
-              <a:rPr sz="1200" dirty="0">
-                <a:solidFill>
-                  <a:srgbClr val="FFFFFF"/>
-                </a:solidFill>
-                <a:latin typeface="Malgun Gothic"/>
-                <a:cs typeface="Malgun Gothic"/>
-              </a:rPr>
-              <a:t>전시</a:t>
-            </a:r>
-            <a:r>
-              <a:rPr sz="1200" spc="-125" dirty="0">
-                <a:solidFill>
-                  <a:srgbClr val="FFFFFF"/>
-                </a:solidFill>
-                <a:latin typeface="Malgun Gothic"/>
-                <a:cs typeface="Malgun Gothic"/>
-              </a:rPr>
-              <a:t> </a:t>
-            </a:r>
-            <a:r>
-              <a:rPr sz="1200" spc="-25" dirty="0">
-                <a:solidFill>
-                  <a:srgbClr val="FFFFFF"/>
-                </a:solidFill>
-                <a:latin typeface="Malgun Gothic"/>
-                <a:cs typeface="Malgun Gothic"/>
-              </a:rPr>
-              <a:t>참여</a:t>
-            </a:r>
-            <a:endParaRPr sz="1200">
-              <a:latin typeface="Malgun Gothic"/>
-              <a:cs typeface="Malgun Gothic"/>
-            </a:endParaRPr>
-          </a:p>
-        </p:txBody>
-      </p:sp>
       <p:sp>
         <p:nvSpPr>
           <p:cNvPr id="32" name="object 32"/>
@@ -30859,7 +30141,7 @@
         </p:nvGraphicFramePr>
         <p:xfrm>
           <a:off x="7697469" y="2485389"/>
-          <a:ext cx="1004569" cy="2187575"/>
+          <a:ext cx="1004569" cy="2880000"/>
         </p:xfrm>
         <a:graphic>
           <a:graphicData uri="http://schemas.openxmlformats.org/drawingml/2006/table">
@@ -30871,23 +30153,141 @@
                 <a:gridCol w="1004569">
                   <a:extLst>
                     <a:ext uri="{9D8B030D-6E8A-4147-A177-3AD203B41FA5}">
-                      <a16:colId xmlns:a16="http://schemas.microsoft.com/office/drawing/2014/main" val="20000"/>
+                      <a14:colId val="20000"/>
                     </a:ext>
                   </a:extLst>
                 </a:gridCol>
               </a:tblGrid>
-              <a:tr h="354330">
+              <a:tr h="360000">
                 <a:tc>
                   <a:txBody>
                     <a:bodyPr/>
                     <a:lstStyle/>
                     <a:p>
-                      <a:pPr marL="1270" algn="ctr">
+                      <a:pPr algn="ctr" marL="1270">
                         <a:lnSpc>
                           <a:spcPct val="100000"/>
                         </a:lnSpc>
                         <a:spcBef>
-                          <a:spcPts val="320"/>
+                          <a:spcPts val="400"/>
+                        </a:spcBef>
+                      </a:pPr>
+                      <a:r>
+                        <a:rPr sz="1400" b="1" spc="-20" dirty="0">
+                          <a:latin typeface="Arial"/>
+                          <a:cs typeface="Arial"/>
+                        </a:rPr>
+                        <a:t>2026</a:t>
+                      </a:r>
+                      <a:endParaRPr sz="1400">
+                        <a:latin typeface="Arial"/>
+                        <a:cs typeface="Arial"/>
+                      </a:endParaRPr>
+                    </a:p>
+                  </a:txBody>
+                  <a:tcPr marL="0" marR="0" marT="50800" marB="0">
+                    <a:lnL w="12700" prstDash="solid">
+                      <a:solidFill>
+                        <a:srgbClr val="FFFFFF"/>
+                      </a:solidFill>
+                    </a:lnL>
+                    <a:lnR w="12700" prstDash="solid">
+                      <a:solidFill>
+                        <a:srgbClr val="FFFFFF"/>
+                      </a:solidFill>
+                    </a:lnR>
+                    <a:lnT w="12700" prstDash="solid">
+                      <a:solidFill>
+                        <a:srgbClr val="FFFFFF"/>
+                      </a:solidFill>
+                    </a:lnT>
+                    <a:lnB w="12700" prstDash="solid">
+                      <a:solidFill>
+                        <a:srgbClr val="FFFFFF"/>
+                      </a:solidFill>
+                    </a:lnB>
+                    <a:solidFill>
+                      <a:srgbClr val="DFDFDF"/>
+                    </a:solidFill>
+                  </a:tcPr>
+                </a:tc>
+                <a:extLst>
+                  <a:ext uri="{0D108BD9-81ED-4DB2-BD59-A6C34878D82A}">
+                    <a14:rowId val="10000"/>
+                  </a:ext>
+                </a:extLst>
+              </a:tr>
+              <a:tr h="360000">
+                <a:tc>
+                  <a:txBody>
+                    <a:bodyPr/>
+                    <a:lstStyle/>
+                    <a:p>
+                      <a:pPr algn="ctr" marL="1270">
+                        <a:lnSpc>
+                          <a:spcPct val="100000"/>
+                        </a:lnSpc>
+                        <a:spcBef>
+                          <a:spcPts val="400"/>
+                        </a:spcBef>
+                      </a:pPr>
+                      <a:r>
+                        <a:rPr sz="1400" b="1" spc="-20" dirty="0">
+                          <a:latin typeface="Arial"/>
+                          <a:cs typeface="Arial"/>
+                        </a:rPr>
+                        <a:t>2026</a:t>
+                      </a:r>
+                      <a:endParaRPr sz="1400">
+                        <a:latin typeface="Arial"/>
+                        <a:cs typeface="Arial"/>
+                      </a:endParaRPr>
+                    </a:p>
+                  </a:txBody>
+                  <a:tcPr marL="0" marR="0" marT="50800" marB="0">
+                    <a:lnL w="12700" prstDash="solid">
+                      <a:solidFill>
+                        <a:srgbClr val="FFFFFF"/>
+                      </a:solidFill>
+                    </a:lnL>
+                    <a:lnR w="12700" prstDash="solid">
+                      <a:solidFill>
+                        <a:srgbClr val="FFFFFF"/>
+                      </a:solidFill>
+                    </a:lnR>
+                    <a:lnT w="12700" prstDash="solid">
+                      <a:solidFill>
+                        <a:srgbClr val="FFFFFF"/>
+                      </a:solidFill>
+                    </a:lnT>
+                    <a:lnB w="12700" prstDash="solid">
+                      <a:solidFill>
+                        <a:srgbClr val="FFFFFF"/>
+                      </a:solidFill>
+                    </a:lnB>
+                    <a:solidFill>
+                      <a:srgbClr val="DFDFDF"/>
+                    </a:solidFill>
+                  </a:tcPr>
+                </a:tc>
+                <a:extLst>
+                  <a:ext uri="{0D108BD9-81ED-4DB2-BD59-A6C34878D82A}">
+                    <a14:rowId val="10001"/>
+                  </a:ext>
+                </a:extLst>
+              </a:tr>
+              <a:tr h="360000">
+                <a:tc>
+                  <a:txBody>
+                    <a:bodyPr/>
+                    <a:lstStyle/>
+                    <a:p>
+                      <a:pPr algn="ctr" marL="1270">
+                        <a:lnSpc>
+                          <a:spcPct val="100000"/>
+                        </a:lnSpc>
+                        <a:spcBef>
+                          <a:spcPts val="400"/>
                         </a:spcBef>
                       </a:pPr>
                       <a:r>
@@ -30903,30 +30303,26 @@
                       </a:endParaRPr>
                     </a:p>
                   </a:txBody>
-                  <a:tcPr marL="0" marR="0" marT="40640" marB="0">
-                    <a:lnL w="12700">
+                  <a:tcPr marL="0" marR="0" marT="50800" marB="0">
+                    <a:lnL w="12700" prstDash="solid">
                       <a:solidFill>
                         <a:srgbClr val="FFFFFF"/>
                       </a:solidFill>
-                      <a:prstDash val="solid"/>
                     </a:lnL>
-                    <a:lnR w="12700">
+                    <a:lnR w="12700" prstDash="solid">
                       <a:solidFill>
                         <a:srgbClr val="FFFFFF"/>
                       </a:solidFill>
-                      <a:prstDash val="solid"/>
                     </a:lnR>
-                    <a:lnT w="12700">
+                    <a:lnT w="12700" prstDash="solid">
                       <a:solidFill>
                         <a:srgbClr val="FFFFFF"/>
                       </a:solidFill>
-                      <a:prstDash val="solid"/>
                     </a:lnT>
-                    <a:lnB w="12700">
+                    <a:lnB w="12700" prstDash="solid">
                       <a:solidFill>
                         <a:srgbClr val="FFFFFF"/>
                       </a:solidFill>
-                      <a:prstDash val="solid"/>
                     </a:lnB>
                     <a:solidFill>
                       <a:srgbClr val="DFDFDF"/>
@@ -30935,80 +30331,17 @@
                 </a:tc>
                 <a:extLst>
                   <a:ext uri="{0D108BD9-81ED-4DB2-BD59-A6C34878D82A}">
-                    <a16:rowId xmlns:a16="http://schemas.microsoft.com/office/drawing/2014/main" val="10000"/>
+                    <a14:rowId val="10002"/>
                   </a:ext>
                 </a:extLst>
               </a:tr>
-              <a:tr h="369570">
+              <a:tr h="360000">
                 <a:tc>
                   <a:txBody>
                     <a:bodyPr/>
                     <a:lstStyle/>
                     <a:p>
-                      <a:pPr marL="1270" algn="ctr">
-                        <a:lnSpc>
-                          <a:spcPct val="100000"/>
-                        </a:lnSpc>
-                        <a:spcBef>
-                          <a:spcPts val="395"/>
-                        </a:spcBef>
-                      </a:pPr>
-                      <a:r>
-                        <a:rPr sz="1400" b="1" spc="-20" dirty="0">
-                          <a:latin typeface="Calibri"/>
-                          <a:cs typeface="Calibri"/>
-                        </a:rPr>
-                        <a:t>2025</a:t>
-                      </a:r>
-                      <a:endParaRPr sz="1400">
-                        <a:latin typeface="Calibri"/>
-                        <a:cs typeface="Calibri"/>
-                      </a:endParaRPr>
-                    </a:p>
-                  </a:txBody>
-                  <a:tcPr marL="0" marR="0" marT="50165" marB="0">
-                    <a:lnL w="12700">
-                      <a:solidFill>
-                        <a:srgbClr val="FFFFFF"/>
-                      </a:solidFill>
-                      <a:prstDash val="solid"/>
-                    </a:lnL>
-                    <a:lnR w="12700">
-                      <a:solidFill>
-                        <a:srgbClr val="FFFFFF"/>
-                      </a:solidFill>
-                      <a:prstDash val="solid"/>
-                    </a:lnR>
-                    <a:lnT w="12700">
-                      <a:solidFill>
-                        <a:srgbClr val="FFFFFF"/>
-                      </a:solidFill>
-                      <a:prstDash val="solid"/>
-                    </a:lnT>
-                    <a:lnB w="12700">
-                      <a:solidFill>
-                        <a:srgbClr val="FFFFFF"/>
-                      </a:solidFill>
-                      <a:prstDash val="solid"/>
-                    </a:lnB>
-                    <a:solidFill>
-                      <a:srgbClr val="DFDFDF"/>
-                    </a:solidFill>
-                  </a:tcPr>
-                </a:tc>
-                <a:extLst>
-                  <a:ext uri="{0D108BD9-81ED-4DB2-BD59-A6C34878D82A}">
-                    <a16:rowId xmlns:a16="http://schemas.microsoft.com/office/drawing/2014/main" val="10001"/>
-                  </a:ext>
-                </a:extLst>
-              </a:tr>
-              <a:tr h="370205">
-                <a:tc>
-                  <a:txBody>
-                    <a:bodyPr/>
-                    <a:lstStyle/>
-                    <a:p>
-                      <a:pPr marL="1270" algn="ctr">
+                      <a:pPr algn="ctr" marL="1270">
                         <a:lnSpc>
                           <a:spcPct val="100000"/>
                         </a:lnSpc>
@@ -31018,41 +30351,37 @@
                       </a:pPr>
                       <a:r>
                         <a:rPr sz="1400" b="1" spc="-20" dirty="0">
-                          <a:latin typeface="Calibri"/>
-                          <a:cs typeface="Calibri"/>
+                          <a:latin typeface="Arial"/>
+                          <a:cs typeface="Arial"/>
                         </a:rPr>
                         <a:t>2025</a:t>
                       </a:r>
                       <a:endParaRPr sz="1400">
-                        <a:latin typeface="Calibri"/>
-                        <a:cs typeface="Calibri"/>
+                        <a:latin typeface="Arial"/>
+                        <a:cs typeface="Arial"/>
                       </a:endParaRPr>
                     </a:p>
                   </a:txBody>
                   <a:tcPr marL="0" marR="0" marT="50800" marB="0">
-                    <a:lnL w="12700">
+                    <a:lnL w="12700" prstDash="solid">
                       <a:solidFill>
                         <a:srgbClr val="FFFFFF"/>
                       </a:solidFill>
-                      <a:prstDash val="solid"/>
                     </a:lnL>
-                    <a:lnR w="12700">
+                    <a:lnR w="12700" prstDash="solid">
                       <a:solidFill>
                         <a:srgbClr val="FFFFFF"/>
                       </a:solidFill>
-                      <a:prstDash val="solid"/>
                     </a:lnR>
-                    <a:lnT w="12700">
+                    <a:lnT w="12700" prstDash="solid">
                       <a:solidFill>
                         <a:srgbClr val="FFFFFF"/>
                       </a:solidFill>
-                      <a:prstDash val="solid"/>
                     </a:lnT>
-                    <a:lnB w="12700">
+                    <a:lnB w="12700" prstDash="solid">
                       <a:solidFill>
                         <a:srgbClr val="FFFFFF"/>
                       </a:solidFill>
-                      <a:prstDash val="solid"/>
                     </a:lnB>
                     <a:solidFill>
                       <a:srgbClr val="DFDFDF"/>
@@ -31061,17 +30390,17 @@
                 </a:tc>
                 <a:extLst>
                   <a:ext uri="{0D108BD9-81ED-4DB2-BD59-A6C34878D82A}">
-                    <a16:rowId xmlns:a16="http://schemas.microsoft.com/office/drawing/2014/main" val="10002"/>
+                    <a14:rowId val="10003"/>
                   </a:ext>
                 </a:extLst>
               </a:tr>
-              <a:tr h="368935">
+              <a:tr h="360000">
                 <a:tc>
                   <a:txBody>
                     <a:bodyPr/>
                     <a:lstStyle/>
                     <a:p>
-                      <a:pPr marL="1270" algn="ctr">
+                      <a:pPr algn="ctr" marL="1270">
                         <a:lnSpc>
                           <a:spcPct val="100000"/>
                         </a:lnSpc>
@@ -31081,41 +30410,37 @@
                       </a:pPr>
                       <a:r>
                         <a:rPr sz="1400" b="1" spc="-20" dirty="0">
-                          <a:latin typeface="Calibri"/>
-                          <a:cs typeface="Calibri"/>
+                          <a:latin typeface="Arial"/>
+                          <a:cs typeface="Arial"/>
                         </a:rPr>
                         <a:t>2025</a:t>
                       </a:r>
                       <a:endParaRPr sz="1400">
-                        <a:latin typeface="Calibri"/>
-                        <a:cs typeface="Calibri"/>
+                        <a:latin typeface="Arial"/>
+                        <a:cs typeface="Arial"/>
                       </a:endParaRPr>
                     </a:p>
                   </a:txBody>
                   <a:tcPr marL="0" marR="0" marT="50800" marB="0">
-                    <a:lnL w="12700">
+                    <a:lnL w="12700" prstDash="solid">
                       <a:solidFill>
                         <a:srgbClr val="FFFFFF"/>
                       </a:solidFill>
-                      <a:prstDash val="solid"/>
                     </a:lnL>
-                    <a:lnR w="12700">
+                    <a:lnR w="12700" prstDash="solid">
                       <a:solidFill>
                         <a:srgbClr val="FFFFFF"/>
                       </a:solidFill>
-                      <a:prstDash val="solid"/>
                     </a:lnR>
-                    <a:lnT w="12700">
+                    <a:lnT w="12700" prstDash="solid">
                       <a:solidFill>
                         <a:srgbClr val="FFFFFF"/>
                       </a:solidFill>
-                      <a:prstDash val="solid"/>
                     </a:lnT>
-                    <a:lnB w="12700">
+                    <a:lnB w="12700" prstDash="solid">
                       <a:solidFill>
                         <a:srgbClr val="FFFFFF"/>
                       </a:solidFill>
-                      <a:prstDash val="solid"/>
                     </a:lnB>
                     <a:solidFill>
                       <a:srgbClr val="DFDFDF"/>
@@ -31124,61 +30449,57 @@
                 </a:tc>
                 <a:extLst>
                   <a:ext uri="{0D108BD9-81ED-4DB2-BD59-A6C34878D82A}">
-                    <a16:rowId xmlns:a16="http://schemas.microsoft.com/office/drawing/2014/main" val="10003"/>
+                    <a14:rowId val="10004"/>
                   </a:ext>
                 </a:extLst>
               </a:tr>
-              <a:tr h="370205">
+              <a:tr h="360000">
                 <a:tc>
                   <a:txBody>
                     <a:bodyPr/>
                     <a:lstStyle/>
                     <a:p>
-                      <a:pPr marL="1270" algn="ctr">
+                      <a:pPr algn="ctr" marL="1270">
                         <a:lnSpc>
                           <a:spcPct val="100000"/>
                         </a:lnSpc>
                         <a:spcBef>
-                          <a:spcPts val="405"/>
+                          <a:spcPts val="400"/>
                         </a:spcBef>
                       </a:pPr>
                       <a:r>
                         <a:rPr sz="1400" b="1" spc="-20" dirty="0">
-                          <a:latin typeface="Calibri"/>
-                          <a:cs typeface="Calibri"/>
+                          <a:latin typeface="Arial"/>
+                          <a:cs typeface="Arial"/>
                         </a:rPr>
                         <a:t>2025</a:t>
                       </a:r>
                       <a:endParaRPr sz="1400">
-                        <a:latin typeface="Calibri"/>
-                        <a:cs typeface="Calibri"/>
+                        <a:latin typeface="Arial"/>
+                        <a:cs typeface="Arial"/>
                       </a:endParaRPr>
                     </a:p>
                   </a:txBody>
-                  <a:tcPr marL="0" marR="0" marT="51435" marB="0">
-                    <a:lnL w="12700">
+                  <a:tcPr marL="0" marR="0" marT="50800" marB="0">
+                    <a:lnL w="12700" prstDash="solid">
                       <a:solidFill>
                         <a:srgbClr val="FFFFFF"/>
                       </a:solidFill>
-                      <a:prstDash val="solid"/>
                     </a:lnL>
-                    <a:lnR w="12700">
+                    <a:lnR w="12700" prstDash="solid">
                       <a:solidFill>
                         <a:srgbClr val="FFFFFF"/>
                       </a:solidFill>
-                      <a:prstDash val="solid"/>
                     </a:lnR>
-                    <a:lnT w="12700">
+                    <a:lnT w="12700" prstDash="solid">
                       <a:solidFill>
                         <a:srgbClr val="FFFFFF"/>
                       </a:solidFill>
-                      <a:prstDash val="solid"/>
                     </a:lnT>
-                    <a:lnB w="12700">
+                    <a:lnB w="12700" prstDash="solid">
                       <a:solidFill>
                         <a:srgbClr val="FFFFFF"/>
                       </a:solidFill>
-                      <a:prstDash val="solid"/>
                     </a:lnB>
                     <a:solidFill>
                       <a:srgbClr val="DFDFDF"/>
@@ -31187,61 +30508,57 @@
                 </a:tc>
                 <a:extLst>
                   <a:ext uri="{0D108BD9-81ED-4DB2-BD59-A6C34878D82A}">
-                    <a16:rowId xmlns:a16="http://schemas.microsoft.com/office/drawing/2014/main" val="10004"/>
+                    <a14:rowId val="10005"/>
                   </a:ext>
                 </a:extLst>
               </a:tr>
-              <a:tr h="354330">
+              <a:tr h="360000">
                 <a:tc>
                   <a:txBody>
                     <a:bodyPr/>
                     <a:lstStyle/>
                     <a:p>
-                      <a:pPr marL="1270" algn="ctr">
+                      <a:pPr algn="ctr" marL="1270">
                         <a:lnSpc>
                           <a:spcPct val="100000"/>
                         </a:lnSpc>
                         <a:spcBef>
-                          <a:spcPts val="405"/>
+                          <a:spcPts val="400"/>
                         </a:spcBef>
                       </a:pPr>
                       <a:r>
                         <a:rPr sz="1400" b="1" spc="-20" dirty="0">
-                          <a:latin typeface="Calibri"/>
-                          <a:cs typeface="Calibri"/>
+                          <a:latin typeface="Arial"/>
+                          <a:cs typeface="Arial"/>
                         </a:rPr>
-                        <a:t>2021</a:t>
+                        <a:t>2025</a:t>
                       </a:r>
                       <a:endParaRPr sz="1400">
-                        <a:latin typeface="Calibri"/>
-                        <a:cs typeface="Calibri"/>
+                        <a:latin typeface="Arial"/>
+                        <a:cs typeface="Arial"/>
                       </a:endParaRPr>
                     </a:p>
                   </a:txBody>
-                  <a:tcPr marL="0" marR="0" marT="51435" marB="0">
-                    <a:lnL w="12700">
+                  <a:tcPr marL="0" marR="0" marT="50800" marB="0">
+                    <a:lnL w="12700" prstDash="solid">
                       <a:solidFill>
                         <a:srgbClr val="FFFFFF"/>
                       </a:solidFill>
-                      <a:prstDash val="solid"/>
                     </a:lnL>
-                    <a:lnR w="12700">
+                    <a:lnR w="12700" prstDash="solid">
                       <a:solidFill>
                         <a:srgbClr val="FFFFFF"/>
                       </a:solidFill>
-                      <a:prstDash val="solid"/>
                     </a:lnR>
-                    <a:lnT w="12700">
+                    <a:lnT w="12700" prstDash="solid">
                       <a:solidFill>
                         <a:srgbClr val="FFFFFF"/>
                       </a:solidFill>
-                      <a:prstDash val="solid"/>
                     </a:lnT>
-                    <a:lnB w="12700">
+                    <a:lnB w="12700" prstDash="solid">
                       <a:solidFill>
                         <a:srgbClr val="FFFFFF"/>
                       </a:solidFill>
-                      <a:prstDash val="solid"/>
                     </a:lnB>
                     <a:solidFill>
                       <a:srgbClr val="DFDFDF"/>
@@ -31250,7 +30567,66 @@
                 </a:tc>
                 <a:extLst>
                   <a:ext uri="{0D108BD9-81ED-4DB2-BD59-A6C34878D82A}">
-                    <a16:rowId xmlns:a16="http://schemas.microsoft.com/office/drawing/2014/main" val="10005"/>
+                    <a14:rowId val="10006"/>
+                  </a:ext>
+                </a:extLst>
+              </a:tr>
+              <a:tr h="360000">
+                <a:tc>
+                  <a:txBody>
+                    <a:bodyPr/>
+                    <a:lstStyle/>
+                    <a:p>
+                      <a:pPr algn="ctr" marL="1270">
+                        <a:lnSpc>
+                          <a:spcPct val="100000"/>
+                        </a:lnSpc>
+                        <a:spcBef>
+                          <a:spcPts val="400"/>
+                        </a:spcBef>
+                      </a:pPr>
+                      <a:r>
+                        <a:rPr sz="1400" b="1" spc="-20" dirty="0">
+                          <a:latin typeface="Arial"/>
+                          <a:cs typeface="Arial"/>
+                        </a:rPr>
+                        <a:t>2021</a:t>
+                      </a:r>
+                      <a:endParaRPr sz="1400">
+                        <a:latin typeface="Arial"/>
+                        <a:cs typeface="Arial"/>
+                      </a:endParaRPr>
+                    </a:p>
+                  </a:txBody>
+                  <a:tcPr marL="0" marR="0" marT="50800" marB="0">
+                    <a:lnL w="12700" prstDash="solid">
+                      <a:solidFill>
+                        <a:srgbClr val="FFFFFF"/>
+                      </a:solidFill>
+                    </a:lnL>
+                    <a:lnR w="12700" prstDash="solid">
+                      <a:solidFill>
+                        <a:srgbClr val="FFFFFF"/>
+                      </a:solidFill>
+                    </a:lnR>
+                    <a:lnT w="12700" prstDash="solid">
+                      <a:solidFill>
+                        <a:srgbClr val="FFFFFF"/>
+                      </a:solidFill>
+                    </a:lnT>
+                    <a:lnB w="12700" prstDash="solid">
+                      <a:solidFill>
+                        <a:srgbClr val="FFFFFF"/>
+                      </a:solidFill>
+                    </a:lnB>
+                    <a:solidFill>
+                      <a:srgbClr val="DFDFDF"/>
+                    </a:solidFill>
+                  </a:tcPr>
+                </a:tc>
+                <a:extLst>
+                  <a:ext uri="{0D108BD9-81ED-4DB2-BD59-A6C34878D82A}">
+                    <a14:rowId val="10007"/>
                   </a:ext>
                 </a:extLst>
               </a:tr>
@@ -31267,14 +30643,14 @@
         <p:spPr>
           <a:xfrm>
             <a:off x="8802116" y="2518028"/>
-            <a:ext cx="2571115" cy="2059305"/>
+            <a:ext cx="2950000" cy="2880000"/>
           </a:xfrm>
           <a:prstGeom prst="rect">
             <a:avLst/>
           </a:prstGeom>
         </p:spPr>
         <p:txBody>
-          <a:bodyPr vert="horz" wrap="square" lIns="0" tIns="12700" rIns="0" bIns="0" rtlCol="0">
+          <a:bodyPr vert="horz" wrap="none" lIns="0" tIns="12700" rIns="0" bIns="0" rtlCol="0">
             <a:spAutoFit/>
           </a:bodyPr>
           <a:lstStyle/>
@@ -31288,272 +30664,18 @@
               </a:spcBef>
             </a:pPr>
             <a:r>
-              <a:rPr sz="1200" dirty="0">
+              <a:rPr sz="1100" dirty="0">
                 <a:solidFill>
                   <a:srgbClr val="FFFFFF"/>
                 </a:solidFill>
                 <a:latin typeface="Malgun Gothic"/>
                 <a:cs typeface="Malgun Gothic"/>
               </a:rPr>
-              <a:t>제</a:t>
-            </a:r>
-            <a:r>
-              <a:rPr sz="1200" dirty="0">
-                <a:solidFill>
-                  <a:srgbClr val="FFFFFF"/>
-                </a:solidFill>
-                <a:latin typeface="Calibri"/>
-                <a:cs typeface="Calibri"/>
-              </a:rPr>
-              <a:t>3</a:t>
-            </a:r>
-            <a:r>
-              <a:rPr sz="1200" dirty="0">
-                <a:solidFill>
-                  <a:srgbClr val="FFFFFF"/>
-                </a:solidFill>
-                <a:latin typeface="Malgun Gothic"/>
-                <a:cs typeface="Malgun Gothic"/>
-              </a:rPr>
-              <a:t>회</a:t>
-            </a:r>
-            <a:r>
-              <a:rPr sz="1200" spc="-40" dirty="0">
-                <a:solidFill>
-                  <a:srgbClr val="FFFFFF"/>
-                </a:solidFill>
-                <a:latin typeface="Malgun Gothic"/>
-                <a:cs typeface="Malgun Gothic"/>
-              </a:rPr>
-              <a:t> </a:t>
-            </a:r>
-            <a:r>
-              <a:rPr sz="1200" dirty="0">
-                <a:solidFill>
-                  <a:srgbClr val="FFFFFF"/>
-                </a:solidFill>
-                <a:latin typeface="Calibri"/>
-                <a:cs typeface="Calibri"/>
-              </a:rPr>
-              <a:t>TU</a:t>
-            </a:r>
-            <a:r>
-              <a:rPr sz="1200" spc="215" dirty="0">
-                <a:solidFill>
-                  <a:srgbClr val="FFFFFF"/>
-                </a:solidFill>
-                <a:latin typeface="Calibri"/>
-                <a:cs typeface="Calibri"/>
-              </a:rPr>
-              <a:t> </a:t>
-            </a:r>
-            <a:r>
-              <a:rPr sz="1200" spc="65" dirty="0">
-                <a:solidFill>
-                  <a:srgbClr val="FFFFFF"/>
-                </a:solidFill>
-                <a:latin typeface="Calibri"/>
-                <a:cs typeface="Calibri"/>
-              </a:rPr>
-              <a:t>Game</a:t>
-            </a:r>
-            <a:r>
-              <a:rPr sz="1200" spc="190" dirty="0">
-                <a:solidFill>
-                  <a:srgbClr val="FFFFFF"/>
-                </a:solidFill>
-                <a:latin typeface="Calibri"/>
-                <a:cs typeface="Calibri"/>
-              </a:rPr>
-              <a:t> </a:t>
-            </a:r>
-            <a:r>
-              <a:rPr sz="1200" spc="60" dirty="0">
-                <a:solidFill>
-                  <a:srgbClr val="FFFFFF"/>
-                </a:solidFill>
-                <a:latin typeface="Calibri"/>
-                <a:cs typeface="Calibri"/>
-              </a:rPr>
-              <a:t>Challeng</a:t>
-            </a:r>
-            <a:r>
-              <a:rPr sz="1200" spc="-80" dirty="0">
-                <a:solidFill>
-                  <a:srgbClr val="FFFFFF"/>
-                </a:solidFill>
-                <a:latin typeface="Calibri"/>
-                <a:cs typeface="Calibri"/>
-              </a:rPr>
-              <a:t> </a:t>
-            </a:r>
-            <a:r>
-              <a:rPr sz="1200" dirty="0">
-                <a:solidFill>
-                  <a:srgbClr val="FFFFFF"/>
-                </a:solidFill>
-                <a:latin typeface="Calibri"/>
-                <a:cs typeface="Calibri"/>
-              </a:rPr>
-              <a:t>e</a:t>
-            </a:r>
-            <a:r>
-              <a:rPr sz="1200" spc="195" dirty="0">
-                <a:solidFill>
-                  <a:srgbClr val="FFFFFF"/>
-                </a:solidFill>
-                <a:latin typeface="Calibri"/>
-                <a:cs typeface="Calibri"/>
-              </a:rPr>
-              <a:t> </a:t>
-            </a:r>
-            <a:r>
-              <a:rPr sz="1200" spc="-25" dirty="0">
-                <a:solidFill>
-                  <a:srgbClr val="FFFFFF"/>
-                </a:solidFill>
-                <a:latin typeface="Malgun Gothic"/>
-                <a:cs typeface="Malgun Gothic"/>
-              </a:rPr>
-              <a:t>우수상</a:t>
-            </a:r>
-            <a:endParaRPr sz="1200">
+              <a:t>창의혁신 아이디어상 (동명대학교 ICT융합대학장상)</a:t>
+            </a:r>
+            <a:endParaRPr sz="1100">
               <a:latin typeface="Malgun Gothic"/>
               <a:cs typeface="Malgun Gothic"/>
-            </a:endParaRPr>
-          </a:p>
-          <a:p>
-            <a:pPr marL="12700" marR="5080">
-              <a:lnSpc>
-                <a:spcPts val="1430"/>
-              </a:lnSpc>
-              <a:spcBef>
-                <a:spcPts val="1145"/>
-              </a:spcBef>
-            </a:pPr>
-            <a:r>
-              <a:rPr sz="1200" dirty="0">
-                <a:solidFill>
-                  <a:srgbClr val="FFFFFF"/>
-                </a:solidFill>
-                <a:latin typeface="Malgun Gothic"/>
-                <a:cs typeface="Malgun Gothic"/>
-              </a:rPr>
-              <a:t>지스타</a:t>
-            </a:r>
-            <a:r>
-              <a:rPr sz="1200" spc="-55" dirty="0">
-                <a:solidFill>
-                  <a:srgbClr val="FFFFFF"/>
-                </a:solidFill>
-                <a:latin typeface="Malgun Gothic"/>
-                <a:cs typeface="Malgun Gothic"/>
-              </a:rPr>
-              <a:t> </a:t>
-            </a:r>
-            <a:r>
-              <a:rPr sz="1200" dirty="0">
-                <a:solidFill>
-                  <a:srgbClr val="FFFFFF"/>
-                </a:solidFill>
-                <a:latin typeface="Malgun Gothic"/>
-                <a:cs typeface="Malgun Gothic"/>
-              </a:rPr>
-              <a:t>인디어워즈</a:t>
-            </a:r>
-            <a:r>
-              <a:rPr sz="1200" spc="-35" dirty="0">
-                <a:solidFill>
-                  <a:srgbClr val="FFFFFF"/>
-                </a:solidFill>
-                <a:latin typeface="Malgun Gothic"/>
-                <a:cs typeface="Malgun Gothic"/>
-              </a:rPr>
-              <a:t> </a:t>
-            </a:r>
-            <a:r>
-              <a:rPr sz="1200" spc="10" dirty="0">
-                <a:solidFill>
-                  <a:srgbClr val="FFFFFF"/>
-                </a:solidFill>
-                <a:latin typeface="Calibri"/>
-                <a:cs typeface="Calibri"/>
-              </a:rPr>
-              <a:t>Best</a:t>
-            </a:r>
-            <a:r>
-              <a:rPr sz="1200" spc="170" dirty="0">
-                <a:solidFill>
-                  <a:srgbClr val="FFFFFF"/>
-                </a:solidFill>
-                <a:latin typeface="Calibri"/>
-                <a:cs typeface="Calibri"/>
-              </a:rPr>
-              <a:t> </a:t>
-            </a:r>
-            <a:r>
-              <a:rPr sz="1200" spc="10" dirty="0">
-                <a:solidFill>
-                  <a:srgbClr val="FFFFFF"/>
-                </a:solidFill>
-                <a:latin typeface="Calibri"/>
-                <a:cs typeface="Calibri"/>
-              </a:rPr>
-              <a:t>Experim</a:t>
-            </a:r>
-            <a:r>
-              <a:rPr sz="1200" spc="-85" dirty="0">
-                <a:solidFill>
-                  <a:srgbClr val="FFFFFF"/>
-                </a:solidFill>
-                <a:latin typeface="Calibri"/>
-                <a:cs typeface="Calibri"/>
-              </a:rPr>
-              <a:t> </a:t>
-            </a:r>
-            <a:r>
-              <a:rPr sz="1200" spc="30" dirty="0">
-                <a:solidFill>
-                  <a:srgbClr val="FFFFFF"/>
-                </a:solidFill>
-                <a:latin typeface="Calibri"/>
-                <a:cs typeface="Calibri"/>
-              </a:rPr>
-              <a:t>ental </a:t>
-            </a:r>
-            <a:r>
-              <a:rPr sz="1200" dirty="0">
-                <a:solidFill>
-                  <a:srgbClr val="FFFFFF"/>
-                </a:solidFill>
-                <a:latin typeface="Calibri"/>
-                <a:cs typeface="Calibri"/>
-              </a:rPr>
-              <a:t>Gam</a:t>
-            </a:r>
-            <a:r>
-              <a:rPr sz="1200" spc="25" dirty="0">
-                <a:solidFill>
-                  <a:srgbClr val="FFFFFF"/>
-                </a:solidFill>
-                <a:latin typeface="Calibri"/>
-                <a:cs typeface="Calibri"/>
-              </a:rPr>
-              <a:t> </a:t>
-            </a:r>
-            <a:r>
-              <a:rPr sz="1200" spc="-50" dirty="0">
-                <a:solidFill>
-                  <a:srgbClr val="FFFFFF"/>
-                </a:solidFill>
-                <a:latin typeface="Calibri"/>
-                <a:cs typeface="Calibri"/>
-              </a:rPr>
-              <a:t>e</a:t>
-            </a:r>
-            <a:endParaRPr sz="1200">
-              <a:latin typeface="Calibri"/>
-              <a:cs typeface="Calibri"/>
             </a:endParaRPr>
           </a:p>
           <a:p>
@@ -31562,288 +30684,164 @@
                 <a:spcPct val="100000"/>
               </a:lnSpc>
               <a:spcBef>
-                <a:spcPts val="385"/>
+                <a:spcPts val="1470"/>
               </a:spcBef>
             </a:pPr>
             <a:r>
-              <a:rPr sz="1200" dirty="0">
+              <a:rPr sz="1100" dirty="0">
                 <a:solidFill>
                   <a:srgbClr val="FFFFFF"/>
                 </a:solidFill>
                 <a:latin typeface="Malgun Gothic"/>
                 <a:cs typeface="Malgun Gothic"/>
               </a:rPr>
-              <a:t>창업아이디어</a:t>
-            </a:r>
-            <a:r>
-              <a:rPr sz="1200" spc="-135" dirty="0">
-                <a:solidFill>
-                  <a:srgbClr val="FFFFFF"/>
-                </a:solidFill>
-                <a:latin typeface="Malgun Gothic"/>
-                <a:cs typeface="Malgun Gothic"/>
-              </a:rPr>
-              <a:t> </a:t>
-            </a:r>
-            <a:r>
-              <a:rPr sz="1200" dirty="0">
-                <a:solidFill>
-                  <a:srgbClr val="FFFFFF"/>
-                </a:solidFill>
-                <a:latin typeface="Malgun Gothic"/>
-                <a:cs typeface="Malgun Gothic"/>
-              </a:rPr>
-              <a:t>경진대회</a:t>
-            </a:r>
-            <a:r>
-              <a:rPr sz="1200" spc="-125" dirty="0">
-                <a:solidFill>
-                  <a:srgbClr val="FFFFFF"/>
-                </a:solidFill>
-                <a:latin typeface="Malgun Gothic"/>
-                <a:cs typeface="Malgun Gothic"/>
-              </a:rPr>
-              <a:t> </a:t>
-            </a:r>
-            <a:r>
-              <a:rPr sz="1200" spc="-25" dirty="0">
-                <a:solidFill>
-                  <a:srgbClr val="FFFFFF"/>
-                </a:solidFill>
-                <a:latin typeface="Malgun Gothic"/>
-                <a:cs typeface="Malgun Gothic"/>
-              </a:rPr>
-              <a:t>우수상</a:t>
-            </a:r>
-            <a:endParaRPr sz="1200">
+              <a:t>동명대학교 TU장학회 장학증서 수여</a:t>
+            </a:r>
+            <a:endParaRPr sz="1100">
               <a:latin typeface="Malgun Gothic"/>
               <a:cs typeface="Malgun Gothic"/>
             </a:endParaRPr>
           </a:p>
           <a:p>
-            <a:pPr marL="12700" marR="330835">
+            <a:pPr marL="12700">
               <a:lnSpc>
-                <a:spcPts val="2910"/>
+                <a:spcPct val="100000"/>
               </a:lnSpc>
               <a:spcBef>
-                <a:spcPts val="345"/>
+                <a:spcPts val="1470"/>
               </a:spcBef>
             </a:pPr>
             <a:r>
-              <a:rPr sz="1200" dirty="0">
+              <a:rPr sz="1100" dirty="0">
                 <a:solidFill>
                   <a:srgbClr val="FFFFFF"/>
                 </a:solidFill>
                 <a:latin typeface="Malgun Gothic"/>
                 <a:cs typeface="Malgun Gothic"/>
               </a:rPr>
-              <a:t>부산지역인재</a:t>
-            </a:r>
-            <a:r>
-              <a:rPr sz="1200" spc="-135" dirty="0">
-                <a:solidFill>
-                  <a:srgbClr val="FFFFFF"/>
-                </a:solidFill>
-                <a:latin typeface="Malgun Gothic"/>
-                <a:cs typeface="Malgun Gothic"/>
-              </a:rPr>
-              <a:t> </a:t>
-            </a:r>
-            <a:r>
-              <a:rPr sz="1200" dirty="0">
-                <a:solidFill>
-                  <a:srgbClr val="FFFFFF"/>
-                </a:solidFill>
-                <a:latin typeface="Malgun Gothic"/>
-                <a:cs typeface="Malgun Gothic"/>
-              </a:rPr>
-              <a:t>장학금</a:t>
-            </a:r>
-            <a:r>
-              <a:rPr sz="1200" spc="-120" dirty="0">
-                <a:solidFill>
-                  <a:srgbClr val="FFFFFF"/>
-                </a:solidFill>
-                <a:latin typeface="Malgun Gothic"/>
-                <a:cs typeface="Malgun Gothic"/>
-              </a:rPr>
-              <a:t> </a:t>
-            </a:r>
-            <a:r>
-              <a:rPr sz="1200" dirty="0">
-                <a:solidFill>
-                  <a:srgbClr val="FFFFFF"/>
-                </a:solidFill>
-                <a:latin typeface="Calibri"/>
-                <a:cs typeface="Calibri"/>
-              </a:rPr>
-              <a:t>IT</a:t>
-            </a:r>
-            <a:r>
-              <a:rPr sz="1200" dirty="0">
-                <a:solidFill>
-                  <a:srgbClr val="FFFFFF"/>
-                </a:solidFill>
-                <a:latin typeface="Malgun Gothic"/>
-                <a:cs typeface="Malgun Gothic"/>
-              </a:rPr>
-              <a:t>분야</a:t>
-            </a:r>
-            <a:r>
-              <a:rPr sz="1200" spc="-60" dirty="0">
-                <a:solidFill>
-                  <a:srgbClr val="FFFFFF"/>
-                </a:solidFill>
-                <a:latin typeface="Malgun Gothic"/>
-                <a:cs typeface="Malgun Gothic"/>
-              </a:rPr>
-              <a:t> </a:t>
-            </a:r>
-            <a:r>
-              <a:rPr sz="1200" spc="-25" dirty="0">
-                <a:solidFill>
-                  <a:srgbClr val="FFFFFF"/>
-                </a:solidFill>
-                <a:latin typeface="Malgun Gothic"/>
-                <a:cs typeface="Malgun Gothic"/>
-              </a:rPr>
-              <a:t>수여 </a:t>
-            </a:r>
-            <a:r>
-              <a:rPr sz="1200" dirty="0">
-                <a:solidFill>
-                  <a:srgbClr val="FFFFFF"/>
-                </a:solidFill>
-                <a:latin typeface="Malgun Gothic"/>
-                <a:cs typeface="Malgun Gothic"/>
-              </a:rPr>
-              <a:t>대동장학재단</a:t>
-            </a:r>
-            <a:r>
-              <a:rPr sz="1200" spc="-135" dirty="0">
-                <a:solidFill>
-                  <a:srgbClr val="FFFFFF"/>
-                </a:solidFill>
-                <a:latin typeface="Malgun Gothic"/>
-                <a:cs typeface="Malgun Gothic"/>
-              </a:rPr>
-              <a:t> </a:t>
-            </a:r>
-            <a:r>
-              <a:rPr sz="1200" dirty="0">
-                <a:solidFill>
-                  <a:srgbClr val="FFFFFF"/>
-                </a:solidFill>
-                <a:latin typeface="Malgun Gothic"/>
-                <a:cs typeface="Malgun Gothic"/>
-              </a:rPr>
-              <a:t>장학금</a:t>
-            </a:r>
-            <a:r>
-              <a:rPr sz="1200" spc="-125" dirty="0">
-                <a:solidFill>
-                  <a:srgbClr val="FFFFFF"/>
-                </a:solidFill>
-                <a:latin typeface="Malgun Gothic"/>
-                <a:cs typeface="Malgun Gothic"/>
-              </a:rPr>
-              <a:t> </a:t>
-            </a:r>
-            <a:r>
-              <a:rPr sz="1200" spc="-25" dirty="0">
-                <a:solidFill>
-                  <a:srgbClr val="FFFFFF"/>
-                </a:solidFill>
-                <a:latin typeface="Malgun Gothic"/>
-                <a:cs typeface="Malgun Gothic"/>
-              </a:rPr>
-              <a:t>수여</a:t>
-            </a:r>
-            <a:endParaRPr sz="1200">
+              <a:t>제3회 TU Game Challenge 우수상</a:t>
+            </a:r>
+            <a:endParaRPr sz="1100">
               <a:latin typeface="Malgun Gothic"/>
               <a:cs typeface="Malgun Gothic"/>
             </a:endParaRPr>
           </a:p>
           <a:p>
-            <a:pPr marL="33020">
+            <a:pPr marL="12700">
               <a:lnSpc>
                 <a:spcPct val="100000"/>
               </a:lnSpc>
               <a:spcBef>
-                <a:spcPts val="1135"/>
+                <a:spcPts val="1470"/>
               </a:spcBef>
             </a:pPr>
             <a:r>
-              <a:rPr sz="1200" dirty="0">
+              <a:rPr sz="1100" dirty="0">
                 <a:solidFill>
                   <a:srgbClr val="FFFFFF"/>
                 </a:solidFill>
-                <a:latin typeface="Calibri"/>
-                <a:cs typeface="Calibri"/>
-              </a:rPr>
-              <a:t>TU-SEED</a:t>
-            </a:r>
-            <a:r>
-              <a:rPr sz="1200" spc="170" dirty="0">
+                <a:latin typeface="Malgun Gothic"/>
+                <a:cs typeface="Malgun Gothic"/>
+              </a:rPr>
+              <a:t>지스타 인디어워즈 Best Experimental Game</a:t>
+            </a:r>
+            <a:endParaRPr sz="1100">
+              <a:latin typeface="Malgun Gothic"/>
+              <a:cs typeface="Malgun Gothic"/>
+            </a:endParaRPr>
+          </a:p>
+          <a:p>
+            <a:pPr marL="12700">
+              <a:lnSpc>
+                <a:spcPct val="100000"/>
+              </a:lnSpc>
+              <a:spcBef>
+                <a:spcPts val="1470"/>
+              </a:spcBef>
+            </a:pPr>
+            <a:r>
+              <a:rPr sz="1100" dirty="0">
                 <a:solidFill>
                   <a:srgbClr val="FFFFFF"/>
                 </a:solidFill>
-                <a:latin typeface="Calibri"/>
-                <a:cs typeface="Calibri"/>
-              </a:rPr>
-              <a:t> </a:t>
-            </a:r>
-            <a:r>
-              <a:rPr sz="1200" spc="-10" dirty="0">
+                <a:latin typeface="Malgun Gothic"/>
+                <a:cs typeface="Malgun Gothic"/>
+              </a:rPr>
+              <a:t>창업아이디어 경진대회 우수상</a:t>
+            </a:r>
+            <a:endParaRPr sz="1100">
+              <a:latin typeface="Malgun Gothic"/>
+              <a:cs typeface="Malgun Gothic"/>
+            </a:endParaRPr>
+          </a:p>
+          <a:p>
+            <a:pPr marL="12700">
+              <a:lnSpc>
+                <a:spcPct val="100000"/>
+              </a:lnSpc>
+              <a:spcBef>
+                <a:spcPts val="1470"/>
+              </a:spcBef>
+            </a:pPr>
+            <a:r>
+              <a:rPr sz="1100" dirty="0">
                 <a:solidFill>
                   <a:srgbClr val="FFFFFF"/>
                 </a:solidFill>
                 <a:latin typeface="Malgun Gothic"/>
                 <a:cs typeface="Malgun Gothic"/>
               </a:rPr>
-              <a:t>리빙랩</a:t>
-            </a:r>
-            <a:r>
-              <a:rPr sz="1200" spc="-50" dirty="0">
+              <a:t>부산지역인재 장학금 (IT 분야) 수여</a:t>
+            </a:r>
+            <a:endParaRPr sz="1100">
+              <a:latin typeface="Malgun Gothic"/>
+              <a:cs typeface="Malgun Gothic"/>
+            </a:endParaRPr>
+          </a:p>
+          <a:p>
+            <a:pPr marL="12700">
+              <a:lnSpc>
+                <a:spcPct val="100000"/>
+              </a:lnSpc>
+              <a:spcBef>
+                <a:spcPts val="1470"/>
+              </a:spcBef>
+            </a:pPr>
+            <a:r>
+              <a:rPr sz="1100" dirty="0">
                 <a:solidFill>
                   <a:srgbClr val="FFFFFF"/>
                 </a:solidFill>
                 <a:latin typeface="Malgun Gothic"/>
                 <a:cs typeface="Malgun Gothic"/>
               </a:rPr>
-              <a:t> </a:t>
-            </a:r>
-            <a:r>
-              <a:rPr sz="1200" dirty="0">
+              <a:t>재단법인 대동장학재단 장학증서 수여</a:t>
+            </a:r>
+            <a:endParaRPr sz="1100">
+              <a:latin typeface="Malgun Gothic"/>
+              <a:cs typeface="Malgun Gothic"/>
+            </a:endParaRPr>
+          </a:p>
+          <a:p>
+            <a:pPr marL="12700">
+              <a:lnSpc>
+                <a:spcPct val="100000"/>
+              </a:lnSpc>
+              <a:spcBef>
+                <a:spcPts val="1470"/>
+              </a:spcBef>
+            </a:pPr>
+            <a:r>
+              <a:rPr sz="1100" dirty="0">
                 <a:solidFill>
                   <a:srgbClr val="FFFFFF"/>
                 </a:solidFill>
                 <a:latin typeface="Malgun Gothic"/>
                 <a:cs typeface="Malgun Gothic"/>
               </a:rPr>
-              <a:t>경진대회</a:t>
-            </a:r>
-            <a:r>
-              <a:rPr sz="1200" spc="-55" dirty="0">
-                <a:solidFill>
-                  <a:srgbClr val="FFFFFF"/>
-                </a:solidFill>
-                <a:latin typeface="Malgun Gothic"/>
-                <a:cs typeface="Malgun Gothic"/>
-              </a:rPr>
-              <a:t> </a:t>
-            </a:r>
-            <a:r>
-              <a:rPr sz="1200" spc="-25" dirty="0">
-                <a:solidFill>
-                  <a:srgbClr val="FFFFFF"/>
-                </a:solidFill>
-                <a:latin typeface="Malgun Gothic"/>
-                <a:cs typeface="Malgun Gothic"/>
-              </a:rPr>
-              <a:t>입상</a:t>
-            </a:r>
-            <a:endParaRPr sz="1200">
+              <a:t>TU-SEED 리빙랩 경진대회 입상</a:t>
+            </a:r>
+            <a:endParaRPr sz="1100">
               <a:latin typeface="Malgun Gothic"/>
               <a:cs typeface="Malgun Gothic"/>
             </a:endParaRPr>
@@ -49468,7 +48466,7 @@
 </file>
 
 <file path=ppt/slides/slide8.xml><?xml version="1.0" encoding="utf-8"?>
-<p:sld xmlns:a="http://schemas.openxmlformats.org/drawingml/2006/main" xmlns:r="http://schemas.openxmlformats.org/officeDocument/2006/relationships" xmlns:p="http://schemas.openxmlformats.org/presentationml/2006/main" showMasterSp="0">
+<p:sld xmlns:a="http://schemas.openxmlformats.org/drawingml/2006/main" xmlns:a14="http://schemas.microsoft.com/office/drawing/2014/main" xmlns:p="http://schemas.openxmlformats.org/presentationml/2006/main" xmlns:r="http://schemas.openxmlformats.org/officeDocument/2006/relationships" showMasterSp="0">
   <p:cSld>
     <p:spTree>
       <p:nvGrpSpPr>
@@ -50482,64 +49480,12 @@
           </p:spPr>
         </p:pic>
       </p:grpSp>
-      <p:sp>
-        <p:nvSpPr>
-          <p:cNvPr id="25" name="object 25"/>
-          <p:cNvSpPr/>
-          <p:nvPr/>
-        </p:nvSpPr>
-        <p:spPr>
-          <a:xfrm>
-            <a:off x="526541" y="1381505"/>
-            <a:ext cx="2286000" cy="4097020"/>
-          </a:xfrm>
-          <a:custGeom>
-            <a:avLst/>
-            <a:gdLst/>
-            <a:ahLst/>
-            <a:cxnLst/>
-            <a:rect l="l" t="t" r="r" b="b"/>
-            <a:pathLst>
-              <a:path w="2286000" h="4097020">
-                <a:moveTo>
-                  <a:pt x="0" y="4096512"/>
-                </a:moveTo>
-                <a:lnTo>
-                  <a:pt x="2286000" y="4096512"/>
-                </a:lnTo>
-                <a:lnTo>
-                  <a:pt x="2286000" y="0"/>
-                </a:lnTo>
-                <a:lnTo>
-                  <a:pt x="0" y="0"/>
-                </a:lnTo>
-                <a:lnTo>
-                  <a:pt x="0" y="4096512"/>
-                </a:lnTo>
-                <a:close/>
-              </a:path>
-            </a:pathLst>
-          </a:custGeom>
-          <a:ln w="25400">
-            <a:solidFill>
-              <a:srgbClr val="FFFFFF"/>
-            </a:solidFill>
-          </a:ln>
-        </p:spPr>
-        <p:txBody>
-          <a:bodyPr wrap="square" lIns="0" tIns="0" rIns="0" bIns="0" rtlCol="0"/>
-          <a:lstStyle/>
-          <a:p>
-            <a:endParaRPr/>
-          </a:p>
-        </p:txBody>
-      </p:sp>
       <p:grpSp>
         <p:nvGrpSpPr>
           <p:cNvPr id="75" name="그룹 74">
             <a:extLst>
               <a:ext uri="{FF2B5EF4-FFF2-40B4-BE49-F238E27FC236}">
-                <a16:creationId xmlns:a16="http://schemas.microsoft.com/office/drawing/2014/main" id="{62FA11B3-1141-D633-D612-96DD7A5ABFD6}"/>
+                <a14:creationId id="{62FA11B3-1141-D633-D612-96DD7A5ABFD6}"/>
               </a:ext>
             </a:extLst>
           </p:cNvPr>
@@ -50939,7 +49885,7 @@
           <p:cNvPr id="74" name="그룹 73">
             <a:extLst>
               <a:ext uri="{FF2B5EF4-FFF2-40B4-BE49-F238E27FC236}">
-                <a16:creationId xmlns:a16="http://schemas.microsoft.com/office/drawing/2014/main" id="{B50F3650-089C-5087-96F3-38746538F97A}"/>
+                <a14:creationId id="{B50F3650-089C-5087-96F3-38746538F97A}"/>
               </a:ext>
             </a:extLst>
           </p:cNvPr>
@@ -51009,7 +49955,7 @@
             <p:cNvPr id="71" name="그룹 70">
               <a:extLst>
                 <a:ext uri="{FF2B5EF4-FFF2-40B4-BE49-F238E27FC236}">
-                  <a16:creationId xmlns:a16="http://schemas.microsoft.com/office/drawing/2014/main" id="{A0728398-D14C-F2FD-A7CE-33415F3AF7EB}"/>
+                  <a14:creationId id="{A0728398-D14C-F2FD-A7CE-33415F3AF7EB}"/>
                 </a:ext>
               </a:extLst>
             </p:cNvPr>
@@ -51409,7 +50355,7 @@
           <p:cNvPr id="73" name="그룹 72">
             <a:extLst>
               <a:ext uri="{FF2B5EF4-FFF2-40B4-BE49-F238E27FC236}">
-                <a16:creationId xmlns:a16="http://schemas.microsoft.com/office/drawing/2014/main" id="{D8C5A5DB-F16A-BBCA-6174-DF87004A662D}"/>
+                <a14:creationId id="{D8C5A5DB-F16A-BBCA-6174-DF87004A662D}"/>
               </a:ext>
             </a:extLst>
           </p:cNvPr>
@@ -51887,607 +50833,6 @@
       </p:grpSp>
       <p:sp>
         <p:nvSpPr>
-          <p:cNvPr id="49" name="object 49"/>
-          <p:cNvSpPr txBox="1"/>
-          <p:nvPr/>
-        </p:nvSpPr>
-        <p:spPr>
-          <a:xfrm>
-            <a:off x="900046" y="4098307"/>
-            <a:ext cx="2662555" cy="612000"/>
-          </a:xfrm>
-          <a:prstGeom prst="rect">
-            <a:avLst/>
-          </a:prstGeom>
-          <a:solidFill>
-            <a:srgbClr val="A4A4A4"/>
-          </a:solidFill>
-          <a:ln w="12700">
-            <a:solidFill>
-              <a:srgbClr val="787878"/>
-            </a:solidFill>
-          </a:ln>
-        </p:spPr>
-        <p:txBody>
-          <a:bodyPr vert="horz" wrap="square" lIns="0" tIns="170815" rIns="0" bIns="0" rtlCol="0">
-            <a:spAutoFit/>
-          </a:bodyPr>
-          <a:lstStyle/>
-          <a:p>
-            <a:pPr marL="241935">
-              <a:lnSpc>
-                <a:spcPct val="100000"/>
-              </a:lnSpc>
-              <a:spcBef>
-                <a:spcPts val="1345"/>
-              </a:spcBef>
-            </a:pPr>
-            <a:r>
-              <a:rPr sz="1800" spc="-10" dirty="0">
-                <a:latin typeface="Calibri"/>
-                <a:cs typeface="Calibri"/>
-              </a:rPr>
-              <a:t>GameObjectGridLayout</a:t>
-            </a:r>
-            <a:endParaRPr sz="1800" dirty="0">
-              <a:latin typeface="Calibri"/>
-              <a:cs typeface="Calibri"/>
-            </a:endParaRPr>
-          </a:p>
-        </p:txBody>
-      </p:sp>
-      <p:sp>
-        <p:nvSpPr>
-          <p:cNvPr id="50" name="object 50"/>
-          <p:cNvSpPr txBox="1"/>
-          <p:nvPr/>
-        </p:nvSpPr>
-        <p:spPr>
-          <a:xfrm>
-            <a:off x="4426067" y="4106562"/>
-            <a:ext cx="2662555" cy="612000"/>
-          </a:xfrm>
-          <a:prstGeom prst="rect">
-            <a:avLst/>
-          </a:prstGeom>
-          <a:solidFill>
-            <a:srgbClr val="FFC000"/>
-          </a:solidFill>
-          <a:ln w="12700">
-            <a:solidFill>
-              <a:srgbClr val="BB8B00"/>
-            </a:solidFill>
-          </a:ln>
-        </p:spPr>
-        <p:txBody>
-          <a:bodyPr vert="horz" wrap="square" lIns="0" tIns="171450" rIns="0" bIns="0" rtlCol="0">
-            <a:spAutoFit/>
-          </a:bodyPr>
-          <a:lstStyle/>
-          <a:p>
-            <a:pPr marL="554355">
-              <a:lnSpc>
-                <a:spcPct val="100000"/>
-              </a:lnSpc>
-              <a:spcBef>
-                <a:spcPts val="1350"/>
-              </a:spcBef>
-            </a:pPr>
-            <a:r>
-              <a:rPr sz="1800" spc="-10" dirty="0" err="1">
-                <a:latin typeface="Calibri"/>
-                <a:cs typeface="Calibri"/>
-              </a:rPr>
-              <a:t>FileGridManager</a:t>
-            </a:r>
-            <a:endParaRPr lang="ko-KR" altLang="en-US" dirty="0">
-              <a:latin typeface="Calibri"/>
-              <a:cs typeface="Calibri"/>
-            </a:endParaRPr>
-          </a:p>
-        </p:txBody>
-      </p:sp>
-      <p:sp>
-        <p:nvSpPr>
-          <p:cNvPr id="51" name="object 51"/>
-          <p:cNvSpPr txBox="1"/>
-          <p:nvPr/>
-        </p:nvSpPr>
-        <p:spPr>
-          <a:xfrm>
-            <a:off x="8132241" y="4097037"/>
-            <a:ext cx="2662555" cy="612000"/>
-          </a:xfrm>
-          <a:prstGeom prst="rect">
-            <a:avLst/>
-          </a:prstGeom>
-          <a:solidFill>
-            <a:srgbClr val="6FAC46"/>
-          </a:solidFill>
-          <a:ln w="12700">
-            <a:solidFill>
-              <a:srgbClr val="507D31"/>
-            </a:solidFill>
-          </a:ln>
-        </p:spPr>
-        <p:txBody>
-          <a:bodyPr vert="horz" wrap="square" lIns="0" tIns="172085" rIns="0" bIns="0" rtlCol="0">
-            <a:spAutoFit/>
-          </a:bodyPr>
-          <a:lstStyle/>
-          <a:p>
-            <a:pPr marL="1905" algn="ctr">
-              <a:lnSpc>
-                <a:spcPct val="100000"/>
-              </a:lnSpc>
-              <a:spcBef>
-                <a:spcPts val="1355"/>
-              </a:spcBef>
-            </a:pPr>
-            <a:r>
-              <a:rPr sz="1800" spc="-10" dirty="0" err="1">
-                <a:latin typeface="Calibri"/>
-                <a:cs typeface="Calibri"/>
-              </a:rPr>
-              <a:t>FileGrid</a:t>
-            </a:r>
-            <a:endParaRPr lang="en-US" spc="-10" dirty="0">
-              <a:latin typeface="Calibri"/>
-              <a:cs typeface="Calibri"/>
-            </a:endParaRPr>
-          </a:p>
-        </p:txBody>
-      </p:sp>
-      <p:sp>
-        <p:nvSpPr>
-          <p:cNvPr id="52" name="object 52"/>
-          <p:cNvSpPr txBox="1"/>
-          <p:nvPr/>
-        </p:nvSpPr>
-        <p:spPr>
-          <a:xfrm>
-            <a:off x="933065" y="4813445"/>
-            <a:ext cx="2319655" cy="505908"/>
-          </a:xfrm>
-          <a:prstGeom prst="rect">
-            <a:avLst/>
-          </a:prstGeom>
-        </p:spPr>
-        <p:txBody>
-          <a:bodyPr vert="horz" wrap="square" lIns="0" tIns="13335" rIns="0" bIns="0" rtlCol="0">
-            <a:spAutoFit/>
-          </a:bodyPr>
-          <a:lstStyle/>
-          <a:p>
-            <a:pPr marL="12700">
-              <a:lnSpc>
-                <a:spcPct val="100000"/>
-              </a:lnSpc>
-              <a:spcBef>
-                <a:spcPts val="105"/>
-              </a:spcBef>
-            </a:pPr>
-            <a:r>
-              <a:rPr sz="1600" dirty="0">
-                <a:latin typeface="Malgun Gothic"/>
-                <a:cs typeface="Malgun Gothic"/>
-              </a:rPr>
-              <a:t>레이아웃</a:t>
-            </a:r>
-            <a:r>
-              <a:rPr sz="1600" spc="-195" dirty="0">
-                <a:latin typeface="Malgun Gothic"/>
-                <a:cs typeface="Malgun Gothic"/>
-              </a:rPr>
-              <a:t> </a:t>
-            </a:r>
-            <a:r>
-              <a:rPr sz="1600" dirty="0">
-                <a:latin typeface="Malgun Gothic"/>
-                <a:cs typeface="Malgun Gothic"/>
-              </a:rPr>
-              <a:t>생성</a:t>
-            </a:r>
-            <a:r>
-              <a:rPr sz="1600" spc="-195" dirty="0">
-                <a:latin typeface="Malgun Gothic"/>
-                <a:cs typeface="Malgun Gothic"/>
-              </a:rPr>
-              <a:t> </a:t>
-            </a:r>
-            <a:r>
-              <a:rPr sz="1600" dirty="0">
-                <a:latin typeface="Malgun Gothic"/>
-                <a:cs typeface="Malgun Gothic"/>
-              </a:rPr>
-              <a:t>정보</a:t>
-            </a:r>
-            <a:r>
-              <a:rPr sz="1600" spc="-195" dirty="0">
-                <a:latin typeface="Malgun Gothic"/>
-                <a:cs typeface="Malgun Gothic"/>
-              </a:rPr>
-              <a:t> </a:t>
-            </a:r>
-            <a:r>
-              <a:rPr sz="1600" dirty="0">
-                <a:latin typeface="Malgun Gothic"/>
-                <a:cs typeface="Malgun Gothic"/>
-              </a:rPr>
-              <a:t>제공</a:t>
-            </a:r>
-            <a:r>
-              <a:rPr sz="1600" spc="-185" dirty="0">
-                <a:latin typeface="Malgun Gothic"/>
-                <a:cs typeface="Malgun Gothic"/>
-              </a:rPr>
-              <a:t> </a:t>
-            </a:r>
-            <a:r>
-              <a:rPr sz="1600" spc="-25" dirty="0">
-                <a:latin typeface="Malgun Gothic"/>
-                <a:cs typeface="Malgun Gothic"/>
-              </a:rPr>
-              <a:t>역할</a:t>
-            </a:r>
-            <a:endParaRPr sz="1600" dirty="0">
-              <a:latin typeface="Malgun Gothic"/>
-              <a:cs typeface="Malgun Gothic"/>
-            </a:endParaRPr>
-          </a:p>
-        </p:txBody>
-      </p:sp>
-      <p:sp>
-        <p:nvSpPr>
-          <p:cNvPr id="53" name="object 53"/>
-          <p:cNvSpPr txBox="1"/>
-          <p:nvPr/>
-        </p:nvSpPr>
-        <p:spPr>
-          <a:xfrm>
-            <a:off x="4454642" y="4743467"/>
-            <a:ext cx="3069590" cy="751488"/>
-          </a:xfrm>
-          <a:prstGeom prst="rect">
-            <a:avLst/>
-          </a:prstGeom>
-        </p:spPr>
-        <p:txBody>
-          <a:bodyPr vert="horz" wrap="square" lIns="0" tIns="12700" rIns="0" bIns="0" rtlCol="0">
-            <a:spAutoFit/>
-          </a:bodyPr>
-          <a:lstStyle/>
-          <a:p>
-            <a:pPr marL="12700">
-              <a:lnSpc>
-                <a:spcPct val="100000"/>
-              </a:lnSpc>
-              <a:spcBef>
-                <a:spcPts val="100"/>
-              </a:spcBef>
-            </a:pPr>
-            <a:r>
-              <a:rPr sz="1600" spc="-10" dirty="0">
-                <a:latin typeface="+mj-lt"/>
-                <a:cs typeface="Calibri"/>
-              </a:rPr>
-              <a:t>GameObjectLayout</a:t>
-            </a:r>
-            <a:r>
-              <a:rPr sz="1600" spc="-10" dirty="0">
-                <a:latin typeface="+mj-lt"/>
-                <a:cs typeface="Malgun Gothic"/>
-              </a:rPr>
-              <a:t>의</a:t>
-            </a:r>
-            <a:r>
-              <a:rPr sz="1600" spc="-150" dirty="0">
-                <a:latin typeface="+mj-lt"/>
-                <a:cs typeface="Malgun Gothic"/>
-              </a:rPr>
-              <a:t> </a:t>
-            </a:r>
-            <a:r>
-              <a:rPr sz="1600" dirty="0">
-                <a:latin typeface="+mj-lt"/>
-                <a:cs typeface="Malgun Gothic"/>
-              </a:rPr>
-              <a:t>정보를</a:t>
-            </a:r>
-            <a:r>
-              <a:rPr sz="1600" spc="-130" dirty="0">
-                <a:latin typeface="+mj-lt"/>
-                <a:cs typeface="Malgun Gothic"/>
-              </a:rPr>
-              <a:t> </a:t>
-            </a:r>
-            <a:r>
-              <a:rPr sz="1600" dirty="0">
-                <a:latin typeface="+mj-lt"/>
-                <a:cs typeface="Malgun Gothic"/>
-              </a:rPr>
-              <a:t>통한</a:t>
-            </a:r>
-            <a:r>
-              <a:rPr sz="1600" spc="-125" dirty="0">
-                <a:latin typeface="+mj-lt"/>
-                <a:cs typeface="Malgun Gothic"/>
-              </a:rPr>
-              <a:t> </a:t>
-            </a:r>
-            <a:r>
-              <a:rPr sz="1600" dirty="0" err="1">
-                <a:latin typeface="+mj-lt"/>
-                <a:cs typeface="Malgun Gothic"/>
-              </a:rPr>
-              <a:t>그리드</a:t>
-            </a:r>
-            <a:r>
-              <a:rPr sz="1600" spc="-130" dirty="0">
-                <a:latin typeface="+mj-lt"/>
-                <a:cs typeface="Malgun Gothic"/>
-              </a:rPr>
-              <a:t> </a:t>
-            </a:r>
-            <a:r>
-              <a:rPr sz="1600" spc="-25" dirty="0" err="1">
-                <a:latin typeface="+mj-lt"/>
-                <a:cs typeface="Malgun Gothic"/>
-              </a:rPr>
-              <a:t>생성</a:t>
-            </a:r>
-            <a:r>
-              <a:rPr lang="en-US" sz="1600" spc="-25" dirty="0">
-                <a:latin typeface="+mj-lt"/>
-                <a:cs typeface="Calibri"/>
-              </a:rPr>
-              <a:t> </a:t>
-            </a:r>
-            <a:r>
-              <a:rPr lang="ko-KR" altLang="en-US" sz="1600" spc="-25" dirty="0">
-                <a:latin typeface="+mj-lt"/>
-                <a:cs typeface="Calibri"/>
-              </a:rPr>
-              <a:t>및</a:t>
-            </a:r>
-            <a:r>
-              <a:rPr lang="en-US" sz="1600" dirty="0">
-                <a:latin typeface="+mj-lt"/>
-                <a:cs typeface="Calibri"/>
-              </a:rPr>
-              <a:t> </a:t>
-            </a:r>
-            <a:r>
-              <a:rPr lang="ko-KR" altLang="en-US" sz="1600" dirty="0" err="1">
-                <a:latin typeface="+mj-lt"/>
-                <a:cs typeface="Calibri"/>
-              </a:rPr>
-              <a:t>서칭</a:t>
-            </a:r>
-            <a:r>
-              <a:rPr lang="ko-KR" altLang="en-US" sz="1600" dirty="0">
-                <a:latin typeface="+mj-lt"/>
-                <a:cs typeface="Calibri"/>
-              </a:rPr>
-              <a:t> 함수 </a:t>
-            </a:r>
-            <a:r>
-              <a:rPr sz="1600" spc="-25" dirty="0" err="1">
-                <a:latin typeface="+mj-lt"/>
-                <a:cs typeface="Malgun Gothic"/>
-              </a:rPr>
-              <a:t>제공</a:t>
-            </a:r>
-            <a:endParaRPr sz="1600" dirty="0">
-              <a:latin typeface="+mj-lt"/>
-              <a:cs typeface="Malgun Gothic"/>
-            </a:endParaRPr>
-          </a:p>
-          <a:p>
-            <a:pPr marL="12700">
-              <a:lnSpc>
-                <a:spcPct val="100000"/>
-              </a:lnSpc>
-            </a:pPr>
-            <a:r>
-              <a:rPr sz="1600" dirty="0" err="1">
-                <a:latin typeface="+mj-lt"/>
-                <a:cs typeface="Malgun Gothic"/>
-              </a:rPr>
-              <a:t>모든</a:t>
-            </a:r>
-            <a:r>
-              <a:rPr sz="1600" spc="-150" dirty="0">
-                <a:latin typeface="+mj-lt"/>
-                <a:cs typeface="Malgun Gothic"/>
-              </a:rPr>
-              <a:t> </a:t>
-            </a:r>
-            <a:r>
-              <a:rPr lang="en-US" altLang="ko-KR" sz="1600" spc="-150" dirty="0" err="1">
-                <a:latin typeface="+mj-lt"/>
-                <a:cs typeface="Malgun Gothic"/>
-              </a:rPr>
-              <a:t>FileGrid</a:t>
-            </a:r>
-            <a:r>
-              <a:rPr lang="ko-KR" altLang="en-US" sz="1600" spc="-150" dirty="0">
-                <a:latin typeface="+mj-lt"/>
-                <a:cs typeface="Malgun Gothic"/>
-              </a:rPr>
-              <a:t>를 </a:t>
-            </a:r>
-            <a:r>
-              <a:rPr sz="1600" spc="-25" dirty="0" err="1">
-                <a:latin typeface="+mj-lt"/>
-                <a:cs typeface="Malgun Gothic"/>
-              </a:rPr>
-              <a:t>관리</a:t>
-            </a:r>
-            <a:endParaRPr sz="1600" dirty="0">
-              <a:latin typeface="+mj-lt"/>
-              <a:cs typeface="Malgun Gothic"/>
-            </a:endParaRPr>
-          </a:p>
-        </p:txBody>
-      </p:sp>
-      <p:sp>
-        <p:nvSpPr>
-          <p:cNvPr id="54" name="object 54"/>
-          <p:cNvSpPr txBox="1"/>
-          <p:nvPr/>
-        </p:nvSpPr>
-        <p:spPr>
-          <a:xfrm>
-            <a:off x="8195246" y="4804554"/>
-            <a:ext cx="2488565" cy="750847"/>
-          </a:xfrm>
-          <a:prstGeom prst="rect">
-            <a:avLst/>
-          </a:prstGeom>
-        </p:spPr>
-        <p:txBody>
-          <a:bodyPr vert="horz" wrap="square" lIns="0" tIns="12065" rIns="0" bIns="0" rtlCol="0">
-            <a:spAutoFit/>
-          </a:bodyPr>
-          <a:lstStyle/>
-          <a:p>
-            <a:pPr marL="12700" marR="5080">
-              <a:lnSpc>
-                <a:spcPct val="100000"/>
-              </a:lnSpc>
-              <a:spcBef>
-                <a:spcPts val="95"/>
-              </a:spcBef>
-            </a:pPr>
-            <a:r>
-              <a:rPr sz="1600" spc="-20" dirty="0">
-                <a:latin typeface="Malgun Gothic"/>
-                <a:cs typeface="Malgun Gothic"/>
-              </a:rPr>
-              <a:t>파일</a:t>
-            </a:r>
-            <a:r>
-              <a:rPr sz="1600" spc="-130" dirty="0">
-                <a:latin typeface="Malgun Gothic"/>
-                <a:cs typeface="Malgun Gothic"/>
-              </a:rPr>
-              <a:t> </a:t>
-            </a:r>
-            <a:r>
-              <a:rPr sz="1600" spc="-20" dirty="0">
-                <a:latin typeface="Malgun Gothic"/>
-                <a:cs typeface="Malgun Gothic"/>
-              </a:rPr>
-              <a:t>유닛의</a:t>
-            </a:r>
-            <a:r>
-              <a:rPr sz="1600" spc="-125" dirty="0">
-                <a:latin typeface="Malgun Gothic"/>
-                <a:cs typeface="Malgun Gothic"/>
-              </a:rPr>
-              <a:t> </a:t>
-            </a:r>
-            <a:r>
-              <a:rPr sz="1600" spc="-20" dirty="0">
-                <a:latin typeface="Malgun Gothic"/>
-                <a:cs typeface="Malgun Gothic"/>
-              </a:rPr>
-              <a:t>점유와</a:t>
-            </a:r>
-            <a:r>
-              <a:rPr sz="1600" spc="-130" dirty="0">
-                <a:latin typeface="Malgun Gothic"/>
-                <a:cs typeface="Malgun Gothic"/>
-              </a:rPr>
-              <a:t> </a:t>
-            </a:r>
-            <a:r>
-              <a:rPr sz="1600" spc="-20" dirty="0">
-                <a:latin typeface="Malgun Gothic"/>
-                <a:cs typeface="Malgun Gothic"/>
-              </a:rPr>
-              <a:t>해제를</a:t>
-            </a:r>
-            <a:r>
-              <a:rPr sz="1600" spc="-125" dirty="0">
-                <a:latin typeface="Malgun Gothic"/>
-                <a:cs typeface="Malgun Gothic"/>
-              </a:rPr>
-              <a:t> </a:t>
-            </a:r>
-            <a:r>
-              <a:rPr sz="1600" spc="-25" dirty="0">
-                <a:latin typeface="Malgun Gothic"/>
-                <a:cs typeface="Malgun Gothic"/>
-              </a:rPr>
-              <a:t>담당함 </a:t>
-            </a:r>
-            <a:r>
-              <a:rPr sz="1600" spc="-20" dirty="0">
-                <a:latin typeface="Malgun Gothic"/>
-                <a:cs typeface="Malgun Gothic"/>
-              </a:rPr>
-              <a:t>버프에</a:t>
-            </a:r>
-            <a:r>
-              <a:rPr sz="1600" spc="-130" dirty="0">
-                <a:latin typeface="Malgun Gothic"/>
-                <a:cs typeface="Malgun Gothic"/>
-              </a:rPr>
-              <a:t> </a:t>
-            </a:r>
-            <a:r>
-              <a:rPr sz="1600" spc="-20" dirty="0">
-                <a:latin typeface="Malgun Gothic"/>
-                <a:cs typeface="Malgun Gothic"/>
-              </a:rPr>
-              <a:t>대한</a:t>
-            </a:r>
-            <a:r>
-              <a:rPr sz="1600" spc="-125" dirty="0">
-                <a:latin typeface="Malgun Gothic"/>
-                <a:cs typeface="Malgun Gothic"/>
-              </a:rPr>
-              <a:t> </a:t>
-            </a:r>
-            <a:r>
-              <a:rPr sz="1600" spc="-20" dirty="0">
-                <a:latin typeface="Malgun Gothic"/>
-                <a:cs typeface="Malgun Gothic"/>
-              </a:rPr>
-              <a:t>정보를</a:t>
-            </a:r>
-            <a:r>
-              <a:rPr sz="1600" spc="-130" dirty="0">
-                <a:latin typeface="Malgun Gothic"/>
-                <a:cs typeface="Malgun Gothic"/>
-              </a:rPr>
-              <a:t> </a:t>
-            </a:r>
-            <a:r>
-              <a:rPr sz="1600" spc="-25" dirty="0">
-                <a:latin typeface="Malgun Gothic"/>
-                <a:cs typeface="Malgun Gothic"/>
-              </a:rPr>
-              <a:t>보유</a:t>
-            </a:r>
-            <a:r>
-              <a:rPr sz="1600" spc="-25" dirty="0">
-                <a:latin typeface="Calibri"/>
-                <a:cs typeface="Calibri"/>
-              </a:rPr>
-              <a:t>.</a:t>
-            </a:r>
-            <a:endParaRPr sz="1600" dirty="0">
-              <a:latin typeface="Calibri"/>
-              <a:cs typeface="Calibri"/>
-            </a:endParaRPr>
-          </a:p>
-        </p:txBody>
-      </p:sp>
-      <p:sp>
-        <p:nvSpPr>
           <p:cNvPr id="57" name="object 57"/>
           <p:cNvSpPr txBox="1">
             <a:spLocks noGrp="1"/>
@@ -52647,98 +50992,1120 @@
           </a:p>
         </p:txBody>
       </p:sp>
-      <p:cxnSp>
-        <p:nvCxnSpPr>
-          <p:cNvPr id="77" name="직선 화살표 연결선 76">
-            <a:extLst>
-              <a:ext uri="{FF2B5EF4-FFF2-40B4-BE49-F238E27FC236}">
-                <a16:creationId xmlns:a16="http://schemas.microsoft.com/office/drawing/2014/main" id="{42E66516-3535-4D4D-7205-F5D458D3F943}"/>
-              </a:ext>
-            </a:extLst>
-          </p:cNvPr>
-          <p:cNvCxnSpPr>
-            <a:cxnSpLocks/>
-            <a:stCxn id="49" idx="3"/>
-            <a:endCxn id="50" idx="1"/>
-          </p:cNvCxnSpPr>
+      <p:sp>
+        <p:nvSpPr>
+          <p:cNvPr id="101" name="Pipeline Card 1 Container"/>
+          <p:cNvSpPr/>
           <p:nvPr/>
-        </p:nvCxnSpPr>
+        </p:nvSpPr>
         <p:spPr>
           <a:xfrm>
-            <a:off x="3562601" y="4404307"/>
-            <a:ext cx="863466" cy="8255"/>
+            <a:off x="550000" y="3960000"/>
+            <a:ext cx="3240000" cy="2120000"/>
           </a:xfrm>
-          <a:prstGeom prst="straightConnector1">
+          <a:prstGeom prst="roundRect">
+            <a:avLst>
+              <a:gd name="adj" fmla="val 1200"/>
+            </a:avLst>
+          </a:prstGeom>
+          <a:solidFill>
+            <a:srgbClr val="FFFFFF"/>
+          </a:solidFill>
+          <a:ln w="19050">
+            <a:solidFill>
+              <a:srgbClr val="CBD5E1"/>
+            </a:solidFill>
+          </a:ln>
+        </p:spPr>
+        <p:txBody>
+          <a:bodyPr anchor="ctr" rtlCol="0"/>
+          <a:lstStyle/>
+          <a:p>
+            <a:endParaRPr/>
+          </a:p>
+        </p:txBody>
+      </p:sp>
+      <p:sp>
+        <p:nvSpPr>
+          <p:cNvPr id="102" name="Pipeline Card 1 Header"/>
+          <p:cNvSpPr/>
+          <p:nvPr/>
+        </p:nvSpPr>
+        <p:spPr>
+          <a:xfrm>
+            <a:off x="550000" y="3960000"/>
+            <a:ext cx="3240000" cy="400000"/>
+          </a:xfrm>
+          <a:prstGeom prst="roundRect">
+            <a:avLst>
+              <a:gd name="adj" fmla="val 1200"/>
+            </a:avLst>
+          </a:prstGeom>
+          <a:solidFill>
+            <a:srgbClr val="1E3A8A"/>
+          </a:solidFill>
+        </p:spPr>
+        <p:txBody>
+          <a:bodyPr anchor="ctr" lIns="72000" tIns="36000" rIns="72000" bIns="36000" wrap="square"/>
+          <a:lstStyle/>
+          <a:p>
+            <a:pPr algn="ctr">
+              <a:lnSpc>
+                <a:spcPct val="100000"/>
+              </a:lnSpc>
+            </a:pPr>
+            <a:r>
+              <a:rPr sz="1050" b="1">
+                <a:solidFill>
+                  <a:srgbClr val="FFFFFF"/>
+                </a:solidFill>
+                <a:latin typeface="Malgun Gothic"/>
+                <a:ea typeface="맑은 고딕"/>
+              </a:rPr>
+              <a:t>STEP 01  ·  GameObjectGridLayout</a:t>
+            </a:r>
+          </a:p>
+          <a:p>
+            <a:pPr algn="ctr">
+              <a:lnSpc>
+                <a:spcPct val="100000"/>
+              </a:lnSpc>
+            </a:pPr>
+            <a:r>
+              <a:rPr sz="800">
+                <a:solidFill>
+                  <a:srgbClr val="93C5FD"/>
+                </a:solidFill>
+                <a:latin typeface="Malgun Gothic"/>
+                <a:ea typeface="맑은 고딕"/>
+              </a:rPr>
+              <a:t>[규격 정의 / Layout Specification]</a:t>
+            </a:r>
+          </a:p>
+        </p:txBody>
+      </p:sp>
+      <p:sp>
+        <p:nvSpPr>
+          <p:cNvPr id="103" name="Pipeline Card 1 Bullets"/>
+          <p:cNvSpPr txBox="1"/>
+          <p:nvPr/>
+        </p:nvSpPr>
+        <p:spPr>
+          <a:xfrm>
+            <a:off x="610000" y="4390000"/>
+            <a:ext cx="3120000" cy="450000"/>
+          </a:xfrm>
+          <a:prstGeom prst="rect">
             <a:avLst/>
           </a:prstGeom>
-          <a:ln w="28575">
+          <a:noFill/>
+        </p:spPr>
+        <p:txBody>
+          <a:bodyPr lIns="36000" tIns="36000" rIns="36000" bIns="36000" wrap="square"/>
+          <a:lstStyle/>
+          <a:p>
+            <a:pPr algn="l">
+              <a:lnSpc>
+                <a:spcPct val="115000"/>
+              </a:lnSpc>
+              <a:spcBef>
+                <a:spcPts val="150"/>
+              </a:spcBef>
+            </a:pPr>
+            <a:r>
+              <a:rPr sz="850">
+                <a:solidFill>
+                  <a:srgbClr val="334155"/>
+                </a:solidFill>
+                <a:latin typeface="Malgun Gothic"/>
+                <a:ea typeface="맑은 고딕"/>
+              </a:rPr>
+              <a:t>• 행·열 개수(rows, cols) 및 셀 크기·간격 산출</a:t>
+            </a:r>
+          </a:p>
+          <a:p>
+            <a:pPr algn="l">
+              <a:lnSpc>
+                <a:spcPct val="115000"/>
+              </a:lnSpc>
+              <a:spcBef>
+                <a:spcPts val="150"/>
+              </a:spcBef>
+            </a:pPr>
+            <a:r>
+              <a:rPr sz="850">
+                <a:solidFill>
+                  <a:srgbClr val="334155"/>
+                </a:solidFill>
+                <a:latin typeface="Malgun Gothic"/>
+                <a:ea typeface="맑은 고딕"/>
+              </a:rPr>
+              <a:t>• 그리드 인덱스 ➔ 월드 스페이스 좌표 변환 수식 제공</a:t>
+            </a:r>
+          </a:p>
+        </p:txBody>
+      </p:sp>
+      <p:sp>
+        <p:nvSpPr>
+          <p:cNvPr id="104" name="Pipeline Card 1 Code"/>
+          <p:cNvSpPr txBox="1"/>
+          <p:nvPr/>
+        </p:nvSpPr>
+        <p:spPr>
+          <a:xfrm>
+            <a:off x="610000" y="4870000"/>
+            <a:ext cx="3120000" cy="1150000"/>
+          </a:xfrm>
+          <a:prstGeom prst="roundRect">
+            <a:avLst>
+              <a:gd name="adj" fmla="val 1000"/>
+            </a:avLst>
+          </a:prstGeom>
+          <a:solidFill>
+            <a:srgbClr val="0F172A"/>
+          </a:solidFill>
+          <a:ln w="12700">
             <a:solidFill>
-              <a:schemeClr val="tx1"/>
+              <a:srgbClr val="334155"/>
             </a:solidFill>
-            <a:tailEnd type="triangle"/>
           </a:ln>
         </p:spPr>
-        <p:style>
-          <a:lnRef idx="1">
-            <a:schemeClr val="accent1"/>
-          </a:lnRef>
-          <a:fillRef idx="0">
-            <a:schemeClr val="accent1"/>
-          </a:fillRef>
-          <a:effectRef idx="0">
-            <a:schemeClr val="accent1"/>
-          </a:effectRef>
-          <a:fontRef idx="minor">
-            <a:schemeClr val="tx1"/>
-          </a:fontRef>
-        </p:style>
-      </p:cxnSp>
-      <p:cxnSp>
-        <p:nvCxnSpPr>
-          <p:cNvPr id="78" name="직선 화살표 연결선 77">
-            <a:extLst>
-              <a:ext uri="{FF2B5EF4-FFF2-40B4-BE49-F238E27FC236}">
-                <a16:creationId xmlns:a16="http://schemas.microsoft.com/office/drawing/2014/main" id="{3492213B-36FA-0020-B4E1-300ED82E3EA3}"/>
-              </a:ext>
-            </a:extLst>
-          </p:cNvPr>
-          <p:cNvCxnSpPr>
-            <a:cxnSpLocks/>
-            <a:stCxn id="50" idx="3"/>
-            <a:endCxn id="51" idx="1"/>
-          </p:cNvCxnSpPr>
+        <p:txBody>
+          <a:bodyPr lIns="80000" tIns="60000" rIns="80000" bIns="60000" wrap="square"/>
+          <a:lstStyle/>
+          <a:p>
+            <a:pPr algn="l">
+              <a:lnSpc>
+                <a:spcPct val="108000"/>
+              </a:lnSpc>
+            </a:pPr>
+            <a:r>
+              <a:rPr sz="720">
+                <a:solidFill>
+                  <a:srgbClr val="94A3B8"/>
+                </a:solidFill>
+                <a:latin typeface="Consolas"/>
+                <a:ea typeface="Consolas"/>
+              </a:rPr>
+              <a:t>// 그리드 규격 산출 &amp; 월드 좌표 변환</a:t>
+            </a:r>
+          </a:p>
+          <a:p>
+            <a:pPr algn="l">
+              <a:lnSpc>
+                <a:spcPct val="108000"/>
+              </a:lnSpc>
+            </a:pPr>
+            <a:r>
+              <a:rPr sz="720" b="1">
+                <a:solidFill>
+                  <a:srgbClr val="38BDF8"/>
+                </a:solidFill>
+                <a:latin typeface="Consolas"/>
+                <a:ea typeface="Consolas"/>
+              </a:rPr>
+              <a:t>Vector2 </a:t>
+            </a:r>
+            <a:r>
+              <a:rPr sz="720">
+                <a:solidFill>
+                  <a:srgbClr val="F8FAFC"/>
+                </a:solidFill>
+                <a:latin typeface="Consolas"/>
+                <a:ea typeface="Consolas"/>
+              </a:rPr>
+              <a:t>cellSize, spacing;</a:t>
+            </a:r>
+          </a:p>
+          <a:p>
+            <a:pPr algn="l">
+              <a:lnSpc>
+                <a:spcPct val="108000"/>
+              </a:lnSpc>
+            </a:pPr>
+            <a:r>
+              <a:rPr sz="720" b="1">
+                <a:solidFill>
+                  <a:srgbClr val="38BDF8"/>
+                </a:solidFill>
+                <a:latin typeface="Consolas"/>
+                <a:ea typeface="Consolas"/>
+              </a:rPr>
+              <a:t>public Vector3 </a:t>
+            </a:r>
+            <a:r>
+              <a:rPr sz="720" b="1">
+                <a:solidFill>
+                  <a:srgbClr val="FDE047"/>
+                </a:solidFill>
+                <a:latin typeface="Consolas"/>
+                <a:ea typeface="Consolas"/>
+              </a:rPr>
+              <a:t>CalcCellPos</a:t>
+            </a:r>
+            <a:r>
+              <a:rPr sz="720">
+                <a:solidFill>
+                  <a:srgbClr val="F8FAFC"/>
+                </a:solidFill>
+                <a:latin typeface="Consolas"/>
+                <a:ea typeface="Consolas"/>
+              </a:rPr>
+              <a:t>(int r, int c) =&gt;</a:t>
+            </a:r>
+          </a:p>
+          <a:p>
+            <a:pPr algn="l">
+              <a:lnSpc>
+                <a:spcPct val="108000"/>
+              </a:lnSpc>
+            </a:pPr>
+            <a:r>
+              <a:rPr sz="720">
+                <a:solidFill>
+                  <a:srgbClr val="F8FAFC"/>
+                </a:solidFill>
+                <a:latin typeface="Consolas"/>
+                <a:ea typeface="Consolas"/>
+              </a:rPr>
+              <a:t>    origin + new Vector3(c * (cellSize.x + spacing.x),</a:t>
+            </a:r>
+          </a:p>
+          <a:p>
+            <a:pPr algn="l">
+              <a:lnSpc>
+                <a:spcPct val="108000"/>
+              </a:lnSpc>
+            </a:pPr>
+            <a:r>
+              <a:rPr sz="720">
+                <a:solidFill>
+                  <a:srgbClr val="F8FAFC"/>
+                </a:solidFill>
+                <a:latin typeface="Consolas"/>
+                <a:ea typeface="Consolas"/>
+              </a:rPr>
+              <a:t>                        -r * (cellSize.y + spacing.y), 0);</a:t>
+            </a:r>
+          </a:p>
+        </p:txBody>
+      </p:sp>
+      <p:sp>
+        <p:nvSpPr>
+          <p:cNvPr id="105" name="Connector 1 Badge"/>
+          <p:cNvSpPr txBox="1"/>
           <p:nvPr/>
-        </p:nvCxnSpPr>
+        </p:nvSpPr>
         <p:spPr>
-          <a:xfrm flipV="1">
-            <a:off x="7088622" y="4403037"/>
-            <a:ext cx="1043619" cy="9525"/>
+          <a:xfrm>
+            <a:off x="3840000" y="4560000"/>
+            <a:ext cx="590000" cy="460000"/>
           </a:xfrm>
-          <a:prstGeom prst="straightConnector1">
+          <a:prstGeom prst="roundRect">
+            <a:avLst>
+              <a:gd name="adj" fmla="val 2500"/>
+            </a:avLst>
+          </a:prstGeom>
+          <a:solidFill>
+            <a:srgbClr val="EFF6FF"/>
+          </a:solidFill>
+          <a:ln w="12700">
+            <a:solidFill>
+              <a:srgbClr val="BFDBFE"/>
+            </a:solidFill>
+          </a:ln>
+        </p:spPr>
+        <p:txBody>
+          <a:bodyPr anchor="ctr" lIns="20000" tIns="20000" rIns="20000" bIns="20000" wrap="square"/>
+          <a:lstStyle/>
+          <a:p>
+            <a:pPr algn="ctr">
+              <a:lnSpc>
+                <a:spcPct val="100000"/>
+              </a:lnSpc>
+            </a:pPr>
+            <a:r>
+              <a:rPr sz="750" b="1">
+                <a:solidFill>
+                  <a:srgbClr val="1E40AF"/>
+                </a:solidFill>
+                <a:latin typeface="Malgun Gothic"/>
+                <a:ea typeface="맑은 고딕"/>
+              </a:rPr>
+              <a:t>규격 파라미터</a:t>
+            </a:r>
+          </a:p>
+          <a:p>
+            <a:pPr algn="ctr">
+              <a:lnSpc>
+                <a:spcPct val="100000"/>
+              </a:lnSpc>
+            </a:pPr>
+            <a:r>
+              <a:rPr sz="750" b="1">
+                <a:solidFill>
+                  <a:srgbClr val="1E40AF"/>
+                </a:solidFill>
+                <a:latin typeface="Malgun Gothic"/>
+                <a:ea typeface="맑은 고딕"/>
+              </a:rPr>
+              <a:t>주입 전달</a:t>
+            </a:r>
+          </a:p>
+        </p:txBody>
+      </p:sp>
+      <p:sp>
+        <p:nvSpPr>
+          <p:cNvPr id="106" name="Connector 1 Arrow"/>
+          <p:cNvSpPr/>
+          <p:nvPr/>
+        </p:nvSpPr>
+        <p:spPr>
+          <a:xfrm>
+            <a:off x="3880000" y="5100000"/>
+            <a:ext cx="510000" cy="160000"/>
+          </a:xfrm>
+          <a:prstGeom prst="rightArrow">
             <a:avLst/>
           </a:prstGeom>
-          <a:ln w="28575">
+          <a:solidFill>
+            <a:srgbClr val="2563EB"/>
+          </a:solidFill>
+        </p:spPr>
+        <p:txBody>
+          <a:bodyPr wrap="none"/>
+          <a:lstStyle/>
+          <a:p>
+            <a:endParaRPr/>
+          </a:p>
+        </p:txBody>
+      </p:sp>
+      <p:sp>
+        <p:nvSpPr>
+          <p:cNvPr id="107" name="Pipeline Card 2 Container"/>
+          <p:cNvSpPr/>
+          <p:nvPr/>
+        </p:nvSpPr>
+        <p:spPr>
+          <a:xfrm>
+            <a:off x="4480000" y="3960000"/>
+            <a:ext cx="3240000" cy="2120000"/>
+          </a:xfrm>
+          <a:prstGeom prst="roundRect">
+            <a:avLst>
+              <a:gd name="adj" fmla="val 1200"/>
+            </a:avLst>
+          </a:prstGeom>
+          <a:solidFill>
+            <a:srgbClr val="FFFFFF"/>
+          </a:solidFill>
+          <a:ln w="19050">
             <a:solidFill>
-              <a:schemeClr val="tx1"/>
+              <a:srgbClr val="CBD5E1"/>
             </a:solidFill>
-            <a:tailEnd type="triangle"/>
           </a:ln>
         </p:spPr>
-        <p:style>
-          <a:lnRef idx="1">
-            <a:schemeClr val="accent1"/>
-          </a:lnRef>
-          <a:fillRef idx="0">
-            <a:schemeClr val="accent1"/>
-          </a:fillRef>
-          <a:effectRef idx="0">
-            <a:schemeClr val="accent1"/>
-          </a:effectRef>
-          <a:fontRef idx="minor">
-            <a:schemeClr val="tx1"/>
-          </a:fontRef>
-        </p:style>
-      </p:cxnSp>
+        <p:txBody>
+          <a:bodyPr anchor="ctr" rtlCol="0"/>
+          <a:lstStyle/>
+          <a:p>
+            <a:endParaRPr/>
+          </a:p>
+        </p:txBody>
+      </p:sp>
+      <p:sp>
+        <p:nvSpPr>
+          <p:cNvPr id="108" name="Pipeline Card 2 Header"/>
+          <p:cNvSpPr/>
+          <p:nvPr/>
+        </p:nvSpPr>
+        <p:spPr>
+          <a:xfrm>
+            <a:off x="4480000" y="3960000"/>
+            <a:ext cx="3240000" cy="400000"/>
+          </a:xfrm>
+          <a:prstGeom prst="roundRect">
+            <a:avLst>
+              <a:gd name="adj" fmla="val 1200"/>
+            </a:avLst>
+          </a:prstGeom>
+          <a:solidFill>
+            <a:srgbClr val="B45309"/>
+          </a:solidFill>
+        </p:spPr>
+        <p:txBody>
+          <a:bodyPr anchor="ctr" lIns="72000" tIns="36000" rIns="72000" bIns="36000" wrap="square"/>
+          <a:lstStyle/>
+          <a:p>
+            <a:pPr algn="ctr">
+              <a:lnSpc>
+                <a:spcPct val="100000"/>
+              </a:lnSpc>
+            </a:pPr>
+            <a:r>
+              <a:rPr sz="1050" b="1">
+                <a:solidFill>
+                  <a:srgbClr val="FFFFFF"/>
+                </a:solidFill>
+                <a:latin typeface="Malgun Gothic"/>
+                <a:ea typeface="맑은 고딕"/>
+              </a:rPr>
+              <a:t>STEP 02  ·  FileGridManager</a:t>
+            </a:r>
+          </a:p>
+          <a:p>
+            <a:pPr algn="ctr">
+              <a:lnSpc>
+                <a:spcPct val="100000"/>
+              </a:lnSpc>
+            </a:pPr>
+            <a:r>
+              <a:rPr sz="800">
+                <a:solidFill>
+                  <a:srgbClr val="FEF3C7"/>
+                </a:solidFill>
+                <a:latin typeface="Malgun Gothic"/>
+                <a:ea typeface="맑은 고딕"/>
+              </a:rPr>
+              <a:t>[공간 인덱싱 &amp; 3×3 탐색 / Spatial Core]</a:t>
+            </a:r>
+          </a:p>
+        </p:txBody>
+      </p:sp>
+      <p:sp>
+        <p:nvSpPr>
+          <p:cNvPr id="109" name="Pipeline Card 2 Bullets"/>
+          <p:cNvSpPr txBox="1"/>
+          <p:nvPr/>
+        </p:nvSpPr>
+        <p:spPr>
+          <a:xfrm>
+            <a:off x="4540000" y="4390000"/>
+            <a:ext cx="3120000" cy="450000"/>
+          </a:xfrm>
+          <a:prstGeom prst="rect">
+            <a:avLst/>
+          </a:prstGeom>
+          <a:noFill/>
+        </p:spPr>
+        <p:txBody>
+          <a:bodyPr lIns="36000" tIns="36000" rIns="36000" bIns="36000" wrap="square"/>
+          <a:lstStyle/>
+          <a:p>
+            <a:pPr algn="l">
+              <a:lnSpc>
+                <a:spcPct val="115000"/>
+              </a:lnSpc>
+              <a:spcBef>
+                <a:spcPts val="150"/>
+              </a:spcBef>
+            </a:pPr>
+            <a:r>
+              <a:rPr sz="850">
+                <a:solidFill>
+                  <a:srgbClr val="334155"/>
+                </a:solidFill>
+                <a:latin typeface="Malgun Gothic"/>
+                <a:ea typeface="맑은 고딕"/>
+              </a:rPr>
+              <a:t>• 2D 인메모리 배열(gridArray[,]) 공간 분할 캐싱</a:t>
+            </a:r>
+          </a:p>
+          <a:p>
+            <a:pPr algn="l">
+              <a:lnSpc>
+                <a:spcPct val="115000"/>
+              </a:lnSpc>
+              <a:spcBef>
+                <a:spcPts val="150"/>
+              </a:spcBef>
+            </a:pPr>
+            <a:r>
+              <a:rPr sz="850">
+                <a:solidFill>
+                  <a:srgbClr val="334155"/>
+                </a:solidFill>
+                <a:latin typeface="Malgun Gothic"/>
+                <a:ea typeface="맑은 고딕"/>
+              </a:rPr>
+              <a:t>• 3×3 국소 인접 셀 O(1) 초고속 거리 매칭 탐색</a:t>
+            </a:r>
+          </a:p>
+        </p:txBody>
+      </p:sp>
+      <p:sp>
+        <p:nvSpPr>
+          <p:cNvPr id="110" name="Pipeline Card 2 Code"/>
+          <p:cNvSpPr txBox="1"/>
+          <p:nvPr/>
+        </p:nvSpPr>
+        <p:spPr>
+          <a:xfrm>
+            <a:off x="4540000" y="4870000"/>
+            <a:ext cx="3120000" cy="1150000"/>
+          </a:xfrm>
+          <a:prstGeom prst="roundRect">
+            <a:avLst>
+              <a:gd name="adj" fmla="val 1000"/>
+            </a:avLst>
+          </a:prstGeom>
+          <a:solidFill>
+            <a:srgbClr val="0F172A"/>
+          </a:solidFill>
+          <a:ln w="12700">
+            <a:solidFill>
+              <a:srgbClr val="334155"/>
+            </a:solidFill>
+          </a:ln>
+        </p:spPr>
+        <p:txBody>
+          <a:bodyPr lIns="80000" tIns="60000" rIns="80000" bIns="60000" wrap="square"/>
+          <a:lstStyle/>
+          <a:p>
+            <a:pPr algn="l">
+              <a:lnSpc>
+                <a:spcPct val="108000"/>
+              </a:lnSpc>
+            </a:pPr>
+            <a:r>
+              <a:rPr sz="720">
+                <a:solidFill>
+                  <a:srgbClr val="94A3B8"/>
+                </a:solidFill>
+                <a:latin typeface="Consolas"/>
+                <a:ea typeface="Consolas"/>
+              </a:rPr>
+              <a:t>// 2D 배열 기반 국소 3x3 O(1) 탐색</a:t>
+            </a:r>
+          </a:p>
+          <a:p>
+            <a:pPr algn="l">
+              <a:lnSpc>
+                <a:spcPct val="108000"/>
+              </a:lnSpc>
+            </a:pPr>
+            <a:r>
+              <a:rPr sz="720" b="1">
+                <a:solidFill>
+                  <a:srgbClr val="38BDF8"/>
+                </a:solidFill>
+                <a:latin typeface="Consolas"/>
+                <a:ea typeface="Consolas"/>
+              </a:rPr>
+              <a:t>FileGrid[,] </a:t>
+            </a:r>
+            <a:r>
+              <a:rPr sz="720">
+                <a:solidFill>
+                  <a:srgbClr val="F8FAFC"/>
+                </a:solidFill>
+                <a:latin typeface="Consolas"/>
+                <a:ea typeface="Consolas"/>
+              </a:rPr>
+              <a:t>gridArray = new FileGrid[rows, cols];</a:t>
+            </a:r>
+          </a:p>
+          <a:p>
+            <a:pPr algn="l">
+              <a:lnSpc>
+                <a:spcPct val="108000"/>
+              </a:lnSpc>
+            </a:pPr>
+            <a:r>
+              <a:rPr sz="720" b="1">
+                <a:solidFill>
+                  <a:srgbClr val="38BDF8"/>
+                </a:solidFill>
+                <a:latin typeface="Consolas"/>
+                <a:ea typeface="Consolas"/>
+              </a:rPr>
+              <a:t>for </a:t>
+            </a:r>
+            <a:r>
+              <a:rPr sz="720">
+                <a:solidFill>
+                  <a:srgbClr val="F8FAFC"/>
+                </a:solidFill>
+                <a:latin typeface="Consolas"/>
+                <a:ea typeface="Consolas"/>
+              </a:rPr>
+              <a:t>(int dx = -1; dx &lt;= 1; dx++)</a:t>
+            </a:r>
+          </a:p>
+          <a:p>
+            <a:pPr algn="l">
+              <a:lnSpc>
+                <a:spcPct val="108000"/>
+              </a:lnSpc>
+            </a:pPr>
+            <a:r>
+              <a:rPr sz="720" b="1">
+                <a:solidFill>
+                  <a:srgbClr val="38BDF8"/>
+                </a:solidFill>
+                <a:latin typeface="Consolas"/>
+                <a:ea typeface="Consolas"/>
+              </a:rPr>
+              <a:t>    for </a:t>
+            </a:r>
+            <a:r>
+              <a:rPr sz="720">
+                <a:solidFill>
+                  <a:srgbClr val="F8FAFC"/>
+                </a:solidFill>
+                <a:latin typeface="Consolas"/>
+                <a:ea typeface="Consolas"/>
+              </a:rPr>
+              <a:t>(int dy = -1; dy &lt;= 1; dy++)</a:t>
+            </a:r>
+          </a:p>
+          <a:p>
+            <a:pPr algn="l">
+              <a:lnSpc>
+                <a:spcPct val="108000"/>
+              </a:lnSpc>
+            </a:pPr>
+            <a:r>
+              <a:rPr sz="720">
+                <a:solidFill>
+                  <a:srgbClr val="F8FAFC"/>
+                </a:solidFill>
+                <a:latin typeface="Consolas"/>
+                <a:ea typeface="Consolas"/>
+              </a:rPr>
+              <a:t>        </a:t>
+            </a:r>
+            <a:r>
+              <a:rPr sz="720" b="1">
+                <a:solidFill>
+                  <a:srgbClr val="FDE047"/>
+                </a:solidFill>
+                <a:latin typeface="Consolas"/>
+                <a:ea typeface="Consolas"/>
+              </a:rPr>
+              <a:t>SearchClosest</a:t>
+            </a:r>
+            <a:r>
+              <a:rPr sz="720">
+                <a:solidFill>
+                  <a:srgbClr val="F8FAFC"/>
+                </a:solidFill>
+                <a:latin typeface="Consolas"/>
+                <a:ea typeface="Consolas"/>
+              </a:rPr>
+              <a:t>(gridArray[x + dx, y + dy]);</a:t>
+            </a:r>
+          </a:p>
+        </p:txBody>
+      </p:sp>
+      <p:sp>
+        <p:nvSpPr>
+          <p:cNvPr id="111" name="Connector 2 Badge"/>
+          <p:cNvSpPr txBox="1"/>
+          <p:nvPr/>
+        </p:nvSpPr>
+        <p:spPr>
+          <a:xfrm>
+            <a:off x="7770000" y="4560000"/>
+            <a:ext cx="590000" cy="460000"/>
+          </a:xfrm>
+          <a:prstGeom prst="roundRect">
+            <a:avLst>
+              <a:gd name="adj" fmla="val 2500"/>
+            </a:avLst>
+          </a:prstGeom>
+          <a:solidFill>
+            <a:srgbClr val="ECFDF5"/>
+          </a:solidFill>
+          <a:ln w="12700">
+            <a:solidFill>
+              <a:srgbClr val="A7F3D0"/>
+            </a:solidFill>
+          </a:ln>
+        </p:spPr>
+        <p:txBody>
+          <a:bodyPr anchor="ctr" lIns="20000" tIns="20000" rIns="20000" bIns="20000" wrap="square"/>
+          <a:lstStyle/>
+          <a:p>
+            <a:pPr algn="ctr">
+              <a:lnSpc>
+                <a:spcPct val="100000"/>
+              </a:lnSpc>
+            </a:pPr>
+            <a:r>
+              <a:rPr sz="750" b="1">
+                <a:solidFill>
+                  <a:srgbClr val="065F46"/>
+                </a:solidFill>
+                <a:latin typeface="Malgun Gothic"/>
+                <a:ea typeface="맑은 고딕"/>
+              </a:rPr>
+              <a:t>2D 인덱스 참조</a:t>
+            </a:r>
+          </a:p>
+          <a:p>
+            <a:pPr algn="ctr">
+              <a:lnSpc>
+                <a:spcPct val="100000"/>
+              </a:lnSpc>
+            </a:pPr>
+            <a:r>
+              <a:rPr sz="750" b="1">
+                <a:solidFill>
+                  <a:srgbClr val="065F46"/>
+                </a:solidFill>
+                <a:latin typeface="Malgun Gothic"/>
+                <a:ea typeface="맑은 고딕"/>
+              </a:rPr>
+              <a:t>&amp; 점유 제어</a:t>
+            </a:r>
+          </a:p>
+        </p:txBody>
+      </p:sp>
+      <p:sp>
+        <p:nvSpPr>
+          <p:cNvPr id="112" name="Connector 2 Arrow"/>
+          <p:cNvSpPr/>
+          <p:nvPr/>
+        </p:nvSpPr>
+        <p:spPr>
+          <a:xfrm>
+            <a:off x="7810000" y="5100000"/>
+            <a:ext cx="510000" cy="160000"/>
+          </a:xfrm>
+          <a:prstGeom prst="rightArrow">
+            <a:avLst/>
+          </a:prstGeom>
+          <a:solidFill>
+            <a:srgbClr val="059669"/>
+          </a:solidFill>
+        </p:spPr>
+        <p:txBody>
+          <a:bodyPr wrap="none"/>
+          <a:lstStyle/>
+          <a:p>
+            <a:endParaRPr/>
+          </a:p>
+        </p:txBody>
+      </p:sp>
+      <p:sp>
+        <p:nvSpPr>
+          <p:cNvPr id="113" name="Pipeline Card 3 Container"/>
+          <p:cNvSpPr/>
+          <p:nvPr/>
+        </p:nvSpPr>
+        <p:spPr>
+          <a:xfrm>
+            <a:off x="8410000" y="3960000"/>
+            <a:ext cx="3240000" cy="2120000"/>
+          </a:xfrm>
+          <a:prstGeom prst="roundRect">
+            <a:avLst>
+              <a:gd name="adj" fmla="val 1200"/>
+            </a:avLst>
+          </a:prstGeom>
+          <a:solidFill>
+            <a:srgbClr val="FFFFFF"/>
+          </a:solidFill>
+          <a:ln w="19050">
+            <a:solidFill>
+              <a:srgbClr val="CBD5E1"/>
+            </a:solidFill>
+          </a:ln>
+        </p:spPr>
+        <p:txBody>
+          <a:bodyPr anchor="ctr" rtlCol="0"/>
+          <a:lstStyle/>
+          <a:p>
+            <a:endParaRPr/>
+          </a:p>
+        </p:txBody>
+      </p:sp>
+      <p:sp>
+        <p:nvSpPr>
+          <p:cNvPr id="114" name="Pipeline Card 3 Header"/>
+          <p:cNvSpPr/>
+          <p:nvPr/>
+        </p:nvSpPr>
+        <p:spPr>
+          <a:xfrm>
+            <a:off x="8410000" y="3960000"/>
+            <a:ext cx="3240000" cy="400000"/>
+          </a:xfrm>
+          <a:prstGeom prst="roundRect">
+            <a:avLst>
+              <a:gd name="adj" fmla="val 1200"/>
+            </a:avLst>
+          </a:prstGeom>
+          <a:solidFill>
+            <a:srgbClr val="065F46"/>
+          </a:solidFill>
+        </p:spPr>
+        <p:txBody>
+          <a:bodyPr anchor="ctr" lIns="72000" tIns="36000" rIns="72000" bIns="36000" wrap="square"/>
+          <a:lstStyle/>
+          <a:p>
+            <a:pPr algn="ctr">
+              <a:lnSpc>
+                <a:spcPct val="100000"/>
+              </a:lnSpc>
+            </a:pPr>
+            <a:r>
+              <a:rPr sz="1050" b="1">
+                <a:solidFill>
+                  <a:srgbClr val="FFFFFF"/>
+                </a:solidFill>
+                <a:latin typeface="Malgun Gothic"/>
+                <a:ea typeface="맑은 고딕"/>
+              </a:rPr>
+              <a:t>STEP 03  ·  FileGrid</a:t>
+            </a:r>
+          </a:p>
+          <a:p>
+            <a:pPr algn="ctr">
+              <a:lnSpc>
+                <a:spcPct val="100000"/>
+              </a:lnSpc>
+            </a:pPr>
+            <a:r>
+              <a:rPr sz="800">
+                <a:solidFill>
+                  <a:srgbClr val="A7F3D0"/>
+                </a:solidFill>
+                <a:latin typeface="Malgun Gothic"/>
+                <a:ea typeface="맑은 고딕"/>
+              </a:rPr>
+              <a:t>[단위 셀 점유 &amp; 버프 동기화 / Data Cell]</a:t>
+            </a:r>
+          </a:p>
+        </p:txBody>
+      </p:sp>
+      <p:sp>
+        <p:nvSpPr>
+          <p:cNvPr id="115" name="Pipeline Card 3 Bullets"/>
+          <p:cNvSpPr txBox="1"/>
+          <p:nvPr/>
+        </p:nvSpPr>
+        <p:spPr>
+          <a:xfrm>
+            <a:off x="8470000" y="4390000"/>
+            <a:ext cx="3120000" cy="450000"/>
+          </a:xfrm>
+          <a:prstGeom prst="rect">
+            <a:avLst/>
+          </a:prstGeom>
+          <a:noFill/>
+        </p:spPr>
+        <p:txBody>
+          <a:bodyPr lIns="36000" tIns="36000" rIns="36000" bIns="36000" wrap="square"/>
+          <a:lstStyle/>
+          <a:p>
+            <a:pPr algn="l">
+              <a:lnSpc>
+                <a:spcPct val="115000"/>
+              </a:lnSpc>
+              <a:spcBef>
+                <a:spcPts val="150"/>
+              </a:spcBef>
+            </a:pPr>
+            <a:r>
+              <a:rPr sz="850">
+                <a:solidFill>
+                  <a:srgbClr val="334155"/>
+                </a:solidFill>
+                <a:latin typeface="Malgun Gothic"/>
+                <a:ea typeface="맑은 고딕"/>
+              </a:rPr>
+              <a:t>• 유닛 배치/이동 시 원자적 점유(SetOccupied) 및 롤백</a:t>
+            </a:r>
+          </a:p>
+          <a:p>
+            <a:pPr algn="l">
+              <a:lnSpc>
+                <a:spcPct val="115000"/>
+              </a:lnSpc>
+              <a:spcBef>
+                <a:spcPts val="150"/>
+              </a:spcBef>
+            </a:pPr>
+            <a:r>
+              <a:rPr sz="850">
+                <a:solidFill>
+                  <a:srgbClr val="334155"/>
+                </a:solidFill>
+                <a:latin typeface="Malgun Gothic"/>
+                <a:ea typeface="맑은 고딕"/>
+              </a:rPr>
+              <a:t>• 인접 타일 버프 소스 컬렉션 관리 및 스탯 갱신</a:t>
+            </a:r>
+          </a:p>
+        </p:txBody>
+      </p:sp>
+      <p:sp>
+        <p:nvSpPr>
+          <p:cNvPr id="116" name="Pipeline Card 3 Code"/>
+          <p:cNvSpPr txBox="1"/>
+          <p:nvPr/>
+        </p:nvSpPr>
+        <p:spPr>
+          <a:xfrm>
+            <a:off x="8470000" y="4870000"/>
+            <a:ext cx="3120000" cy="1150000"/>
+          </a:xfrm>
+          <a:prstGeom prst="roundRect">
+            <a:avLst>
+              <a:gd name="adj" fmla="val 1000"/>
+            </a:avLst>
+          </a:prstGeom>
+          <a:solidFill>
+            <a:srgbClr val="0F172A"/>
+          </a:solidFill>
+          <a:ln w="12700">
+            <a:solidFill>
+              <a:srgbClr val="334155"/>
+            </a:solidFill>
+          </a:ln>
+        </p:spPr>
+        <p:txBody>
+          <a:bodyPr lIns="80000" tIns="60000" rIns="80000" bIns="60000" wrap="square"/>
+          <a:lstStyle/>
+          <a:p>
+            <a:pPr algn="l">
+              <a:lnSpc>
+                <a:spcPct val="108000"/>
+              </a:lnSpc>
+            </a:pPr>
+            <a:r>
+              <a:rPr sz="720">
+                <a:solidFill>
+                  <a:srgbClr val="94A3B8"/>
+                </a:solidFill>
+                <a:latin typeface="Consolas"/>
+                <a:ea typeface="Consolas"/>
+              </a:rPr>
+              <a:t>// 원자적 유닛 점유 &amp; 버프 동기화</a:t>
+            </a:r>
+          </a:p>
+          <a:p>
+            <a:pPr algn="l">
+              <a:lnSpc>
+                <a:spcPct val="108000"/>
+              </a:lnSpc>
+            </a:pPr>
+            <a:r>
+              <a:rPr sz="720" b="1">
+                <a:solidFill>
+                  <a:srgbClr val="38BDF8"/>
+                </a:solidFill>
+                <a:latin typeface="Consolas"/>
+                <a:ea typeface="Consolas"/>
+              </a:rPr>
+              <a:t>HashSet&lt;File_Base&gt; </a:t>
+            </a:r>
+            <a:r>
+              <a:rPr sz="720">
+                <a:solidFill>
+                  <a:srgbClr val="F8FAFC"/>
+                </a:solidFill>
+                <a:latin typeface="Consolas"/>
+                <a:ea typeface="Consolas"/>
+              </a:rPr>
+              <a:t>buffSources;</a:t>
+            </a:r>
+          </a:p>
+          <a:p>
+            <a:pPr algn="l">
+              <a:lnSpc>
+                <a:spcPct val="108000"/>
+              </a:lnSpc>
+            </a:pPr>
+            <a:r>
+              <a:rPr sz="720" b="1">
+                <a:solidFill>
+                  <a:srgbClr val="38BDF8"/>
+                </a:solidFill>
+                <a:latin typeface="Consolas"/>
+                <a:ea typeface="Consolas"/>
+              </a:rPr>
+              <a:t>public void </a:t>
+            </a:r>
+            <a:r>
+              <a:rPr sz="720" b="1">
+                <a:solidFill>
+                  <a:srgbClr val="FDE047"/>
+                </a:solidFill>
+                <a:latin typeface="Consolas"/>
+                <a:ea typeface="Consolas"/>
+              </a:rPr>
+              <a:t>SetOccupied</a:t>
+            </a:r>
+            <a:r>
+              <a:rPr sz="720">
+                <a:solidFill>
+                  <a:srgbClr val="F8FAFC"/>
+                </a:solidFill>
+                <a:latin typeface="Consolas"/>
+                <a:ea typeface="Consolas"/>
+              </a:rPr>
+              <a:t>(File_Base unit) {</a:t>
+            </a:r>
+          </a:p>
+          <a:p>
+            <a:pPr algn="l">
+              <a:lnSpc>
+                <a:spcPct val="108000"/>
+              </a:lnSpc>
+            </a:pPr>
+            <a:r>
+              <a:rPr sz="720">
+                <a:solidFill>
+                  <a:srgbClr val="F8FAFC"/>
+                </a:solidFill>
+                <a:latin typeface="Consolas"/>
+                <a:ea typeface="Consolas"/>
+              </a:rPr>
+              <a:t>    CurrentUnit = unit;</a:t>
+            </a:r>
+          </a:p>
+          <a:p>
+            <a:pPr algn="l">
+              <a:lnSpc>
+                <a:spcPct val="108000"/>
+              </a:lnSpc>
+            </a:pPr>
+            <a:r>
+              <a:rPr sz="720">
+                <a:solidFill>
+                  <a:srgbClr val="F8FAFC"/>
+                </a:solidFill>
+                <a:latin typeface="Consolas"/>
+                <a:ea typeface="Consolas"/>
+              </a:rPr>
+              <a:t>    </a:t>
+            </a:r>
+            <a:r>
+              <a:rPr sz="720" b="1">
+                <a:solidFill>
+                  <a:srgbClr val="FDE047"/>
+                </a:solidFill>
+                <a:latin typeface="Consolas"/>
+                <a:ea typeface="Consolas"/>
+              </a:rPr>
+              <a:t>UpdateBuffs</a:t>
+            </a:r>
+            <a:r>
+              <a:rPr sz="720">
+                <a:solidFill>
+                  <a:srgbClr val="F8FAFC"/>
+                </a:solidFill>
+                <a:latin typeface="Consolas"/>
+                <a:ea typeface="Consolas"/>
+              </a:rPr>
+              <a:t>(buffSources); }</a:t>
+            </a:r>
+          </a:p>
+        </p:txBody>
+      </p:sp>
     </p:spTree>
   </p:cSld>
   <p:clrMapOvr>
